--- a/slides/GATE-3/AEGIS_Gate3_Storyboard.pptx
+++ b/slides/GATE-3/AEGIS_Gate3_Storyboard.pptx
@@ -27849,28 +27849,6 @@
                 <a:latin typeface="Calibri"/>
               </a:rPr>
               <a:t>Fauzan Ejaz (Captain)</a:t>
-            </a:r>
-          </a:p>
-          <a:p>
-            <a:r>
-              <a:rPr sz="2000">
-                <a:solidFill>
-                  <a:srgbClr val="020C31"/>
-                </a:solidFill>
-                <a:latin typeface="Calibri"/>
-              </a:rPr>
-              <a:t>Adithya Zacharia Valavi</a:t>
-            </a:r>
-          </a:p>
-          <a:p>
-            <a:r>
-              <a:rPr sz="2000">
-                <a:solidFill>
-                  <a:srgbClr val="020C31"/>
-                </a:solidFill>
-                <a:latin typeface="Calibri"/>
-              </a:rPr>
-              <a:t>Ghazanfar Anees Siddiqui</a:t>
             </a:r>
           </a:p>
           <a:p>

--- a/slides/GATE-3/AEGIS_Gate3_Storyboard.pptx
+++ b/slides/GATE-3/AEGIS_Gate3_Storyboard.pptx
@@ -6002,7 +6002,7 @@
           <a:p>
             <a:pPr algn="l"/>
             <a:r>
-              <a:rPr sz="900" b="1">
+              <a:rPr sz="850" b="1">
                 <a:solidFill>
                   <a:srgbClr val="020C31"/>
                 </a:solidFill>
@@ -6014,13 +6014,25 @@
           <a:p>
             <a:pPr algn="l"/>
             <a:r>
-              <a:rPr sz="850" i="1">
+              <a:rPr sz="800" i="1">
                 <a:solidFill>
                   <a:srgbClr val="555555"/>
                 </a:solidFill>
                 <a:latin typeface="Calibri"/>
               </a:rPr>
               <a:t>"A stolen ID badge still opens the door."</a:t>
+            </a:r>
+          </a:p>
+          <a:p>
+            <a:pPr algn="l"/>
+            <a:r>
+              <a:rPr sz="750" b="1">
+                <a:solidFill>
+                  <a:srgbClr val="0E7090"/>
+                </a:solidFill>
+                <a:latin typeface="Calibri"/>
+              </a:rPr>
+              <a:t>NEW: live-action B-roll (badge scan)</a:t>
             </a:r>
           </a:p>
         </p:txBody>
@@ -6049,7 +6061,7 @@
           <a:p>
             <a:pPr algn="l"/>
             <a:r>
-              <a:rPr sz="900" b="1">
+              <a:rPr sz="850" b="1">
                 <a:solidFill>
                   <a:srgbClr val="020C31"/>
                 </a:solidFill>
@@ -6061,13 +6073,25 @@
           <a:p>
             <a:pPr algn="l"/>
             <a:r>
-              <a:rPr sz="850" i="1">
+              <a:rPr sz="800" i="1">
                 <a:solidFill>
                   <a:srgbClr val="555555"/>
                 </a:solidFill>
                 <a:latin typeface="Calibri"/>
               </a:rPr>
               <a:t>"The badge is valid."</a:t>
+            </a:r>
+          </a:p>
+          <a:p>
+            <a:pPr algn="l"/>
+            <a:r>
+              <a:rPr sz="750" b="1">
+                <a:solidFill>
+                  <a:srgbClr val="0E7090"/>
+                </a:solidFill>
+                <a:latin typeface="Calibri"/>
+              </a:rPr>
+              <a:t>NEW: live-action B-roll (same shot, continued)</a:t>
             </a:r>
           </a:p>
         </p:txBody>
@@ -6096,7 +6120,7 @@
           <a:p>
             <a:pPr algn="l"/>
             <a:r>
-              <a:rPr sz="900" b="1">
+              <a:rPr sz="850" b="1">
                 <a:solidFill>
                   <a:srgbClr val="020C31"/>
                 </a:solidFill>
@@ -6108,13 +6132,25 @@
           <a:p>
             <a:pPr algn="l"/>
             <a:r>
-              <a:rPr sz="850" i="1">
+              <a:rPr sz="800" i="1">
                 <a:solidFill>
                   <a:srgbClr val="555555"/>
                 </a:solidFill>
                 <a:latin typeface="Calibri"/>
               </a:rPr>
               <a:t>"But is the person behind it really who they claim to be?"</a:t>
+            </a:r>
+          </a:p>
+          <a:p>
+            <a:pPr algn="l"/>
+            <a:r>
+              <a:rPr sz="750" b="1">
+                <a:solidFill>
+                  <a:srgbClr val="0E7090"/>
+                </a:solidFill>
+                <a:latin typeface="Calibri"/>
+              </a:rPr>
+              <a:t>ASSET: assets/architecture.png</a:t>
             </a:r>
           </a:p>
         </p:txBody>
@@ -6143,7 +6179,7 @@
           <a:p>
             <a:pPr algn="l"/>
             <a:r>
-              <a:rPr sz="900" b="1">
+              <a:rPr sz="850" b="1">
                 <a:solidFill>
                   <a:srgbClr val="020C31"/>
                 </a:solidFill>
@@ -6155,13 +6191,25 @@
           <a:p>
             <a:pPr algn="l"/>
             <a:r>
-              <a:rPr sz="850" i="1">
+              <a:rPr sz="800" i="1">
                 <a:solidFill>
                   <a:srgbClr val="555555"/>
                 </a:solidFill>
                 <a:latin typeface="Calibri"/>
               </a:rPr>
               <a:t>AI agents and automations now call the network directly.</a:t>
+            </a:r>
+          </a:p>
+          <a:p>
+            <a:pPr algn="l"/>
+            <a:r>
+              <a:rPr sz="750" b="1">
+                <a:solidFill>
+                  <a:srgbClr val="0E7090"/>
+                </a:solidFill>
+                <a:latin typeface="Calibri"/>
+              </a:rPr>
+              <a:t>ASSET: reports/GATE-2/aegis_hook_analogy.png (right panel, "THE NETWORK")</a:t>
             </a:r>
           </a:p>
         </p:txBody>
@@ -6190,7 +6238,7 @@
           <a:p>
             <a:pPr algn="l"/>
             <a:r>
-              <a:rPr sz="900" b="1">
+              <a:rPr sz="850" b="1">
                 <a:solidFill>
                   <a:srgbClr val="020C31"/>
                 </a:solidFill>
@@ -6202,13 +6250,25 @@
           <a:p>
             <a:pPr algn="l"/>
             <a:r>
-              <a:rPr sz="850" i="1">
+              <a:rPr sz="800" i="1">
                 <a:solidFill>
                   <a:srgbClr val="555555"/>
                 </a:solidFill>
                 <a:latin typeface="Calibri"/>
               </a:rPr>
               <a:t>A stolen or misused credential still passes every check.</a:t>
+            </a:r>
+          </a:p>
+          <a:p>
+            <a:pPr algn="l"/>
+            <a:r>
+              <a:rPr sz="750" b="1">
+                <a:solidFill>
+                  <a:srgbClr val="0E7090"/>
+                </a:solidFill>
+                <a:latin typeface="Calibri"/>
+              </a:rPr>
+              <a:t>ASSET: reports/GATE-2/aegis_hook_analogy.png (checkmark line)</a:t>
             </a:r>
           </a:p>
         </p:txBody>
@@ -6237,25 +6297,37 @@
           <a:p>
             <a:pPr algn="l"/>
             <a:r>
-              <a:rPr sz="900" b="1">
+              <a:rPr sz="850" b="1">
                 <a:solidFill>
                   <a:srgbClr val="020C31"/>
                 </a:solidFill>
                 <a:latin typeface="Calibri"/>
               </a:rPr>
-              <a:t>Cut to red alert icon / question mark</a:t>
+              <a:t>Cut to red alert icon / question mark, AEGIS title reveal</a:t>
             </a:r>
           </a:p>
           <a:p>
             <a:pPr algn="l"/>
             <a:r>
-              <a:rPr sz="850" i="1">
+              <a:rPr sz="800" i="1">
                 <a:solidFill>
                   <a:srgbClr val="555555"/>
                 </a:solidFill>
                 <a:latin typeface="Calibri"/>
               </a:rPr>
               <a:t>"AEGIS" title card reveal.</a:t>
+            </a:r>
+          </a:p>
+          <a:p>
+            <a:pPr algn="l"/>
+            <a:r>
+              <a:rPr sz="750" b="1">
+                <a:solidFill>
+                  <a:srgbClr val="0E7090"/>
+                </a:solidFill>
+                <a:latin typeface="Calibri"/>
+              </a:rPr>
+              <a:t>ASSET: slides/GATE-2/AEGIS_Gate2_Official.pptx, Slide 3 (hook slide)</a:t>
             </a:r>
           </a:p>
         </p:txBody>
@@ -8993,7 +9065,7 @@
           <a:p>
             <a:pPr algn="l"/>
             <a:r>
-              <a:rPr sz="900" b="1">
+              <a:rPr sz="850" b="1">
                 <a:solidFill>
                   <a:srgbClr val="020C31"/>
                 </a:solidFill>
@@ -9005,13 +9077,25 @@
           <a:p>
             <a:pPr algn="l"/>
             <a:r>
-              <a:rPr sz="850" i="1">
+              <a:rPr sz="800" i="1">
                 <a:solidFill>
                   <a:srgbClr val="555555"/>
                 </a:solidFill>
                 <a:latin typeface="Calibri"/>
               </a:rPr>
               <a:t>"This is AEGIS."</a:t>
+            </a:r>
+          </a:p>
+          <a:p>
+            <a:pPr algn="l"/>
+            <a:r>
+              <a:rPr sz="750" b="1">
+                <a:solidFill>
+                  <a:srgbClr val="0E7090"/>
+                </a:solidFill>
+                <a:latin typeface="Calibri"/>
+              </a:rPr>
+              <a:t>ASSET: slides/GATE-2/AEGIS_Gate2_Official.pptx, Slide 1 (cover)</a:t>
             </a:r>
           </a:p>
         </p:txBody>
@@ -9040,7 +9124,7 @@
           <a:p>
             <a:pPr algn="l"/>
             <a:r>
-              <a:rPr sz="900" b="1">
+              <a:rPr sz="850" b="1">
                 <a:solidFill>
                   <a:srgbClr val="020C31"/>
                 </a:solidFill>
@@ -9052,13 +9136,25 @@
           <a:p>
             <a:pPr algn="l"/>
             <a:r>
-              <a:rPr sz="850" i="1">
+              <a:rPr sz="800" i="1">
                 <a:solidFill>
                   <a:srgbClr val="555555"/>
                 </a:solidFill>
                 <a:latin typeface="Calibri"/>
               </a:rPr>
               <a:t>A zero-trust identity gate for AI agents on the network.</a:t>
+            </a:r>
+          </a:p>
+          <a:p>
+            <a:pPr algn="l"/>
+            <a:r>
+              <a:rPr sz="750" b="1">
+                <a:solidFill>
+                  <a:srgbClr val="0E7090"/>
+                </a:solidFill>
+                <a:latin typeface="Calibri"/>
+              </a:rPr>
+              <a:t>ASSET: assets/architecture.png (cropped/teased)</a:t>
             </a:r>
           </a:p>
         </p:txBody>
@@ -9087,7 +9183,7 @@
           <a:p>
             <a:pPr algn="l"/>
             <a:r>
-              <a:rPr sz="900" b="1">
+              <a:rPr sz="850" b="1">
                 <a:solidFill>
                   <a:srgbClr val="020C31"/>
                 </a:solidFill>
@@ -9099,13 +9195,25 @@
           <a:p>
             <a:pPr algn="l"/>
             <a:r>
-              <a:rPr sz="850" i="1">
+              <a:rPr sz="800" i="1">
                 <a:solidFill>
                   <a:srgbClr val="555555"/>
                 </a:solidFill>
                 <a:latin typeface="Calibri"/>
               </a:rPr>
               <a:t>Built by Team 4, 5G Academy 2026.</a:t>
+            </a:r>
+          </a:p>
+          <a:p>
+            <a:pPr algn="l"/>
+            <a:r>
+              <a:rPr sz="750" b="1">
+                <a:solidFill>
+                  <a:srgbClr val="0E7090"/>
+                </a:solidFill>
+                <a:latin typeface="Calibri"/>
+              </a:rPr>
+              <a:t>NEW: live-action B-roll (team working)</a:t>
             </a:r>
           </a:p>
         </p:txBody>
@@ -9134,7 +9242,7 @@
           <a:p>
             <a:pPr algn="l"/>
             <a:r>
-              <a:rPr sz="900" b="1">
+              <a:rPr sz="850" b="1">
                 <a:solidFill>
                   <a:srgbClr val="020C31"/>
                 </a:solidFill>
@@ -9146,13 +9254,25 @@
           <a:p>
             <a:pPr algn="l"/>
             <a:r>
-              <a:rPr sz="850" i="1">
+              <a:rPr sz="800" i="1">
                 <a:solidFill>
                   <a:srgbClr val="555555"/>
                 </a:solidFill>
                 <a:latin typeface="Calibri"/>
               </a:rPr>
               <a:t>In partnership with Fastweb and Vodafone.</a:t>
+            </a:r>
+          </a:p>
+          <a:p>
+            <a:pPr algn="l"/>
+            <a:r>
+              <a:rPr sz="750" b="1">
+                <a:solidFill>
+                  <a:srgbClr val="0E7090"/>
+                </a:solidFill>
+                <a:latin typeface="Calibri"/>
+              </a:rPr>
+              <a:t>ASSET: slides/GATE-2/AEGIS_Gate2_Official.pptx, Slide 1 (branding)</a:t>
             </a:r>
           </a:p>
         </p:txBody>
@@ -9181,7 +9301,7 @@
           <a:p>
             <a:pPr algn="l"/>
             <a:r>
-              <a:rPr sz="900" b="1">
+              <a:rPr sz="850" b="1">
                 <a:solidFill>
                   <a:srgbClr val="020C31"/>
                 </a:solidFill>
@@ -9193,13 +9313,25 @@
           <a:p>
             <a:pPr algn="l"/>
             <a:r>
-              <a:rPr sz="850" i="1">
+              <a:rPr sz="800" i="1">
                 <a:solidFill>
                   <a:srgbClr val="555555"/>
                 </a:solidFill>
                 <a:latin typeface="Calibri"/>
               </a:rPr>
               <a:t>Bridge into the problem.</a:t>
+            </a:r>
+          </a:p>
+          <a:p>
+            <a:pPr algn="l"/>
+            <a:r>
+              <a:rPr sz="750" b="1">
+                <a:solidFill>
+                  <a:srgbClr val="0E7090"/>
+                </a:solidFill>
+                <a:latin typeface="Calibri"/>
+              </a:rPr>
+              <a:t>NEW: transition graphic</a:t>
             </a:r>
           </a:p>
         </p:txBody>
@@ -9228,13 +9360,25 @@
           <a:p>
             <a:pPr algn="l"/>
             <a:r>
-              <a:rPr sz="900" b="1">
+              <a:rPr sz="850" b="1">
                 <a:solidFill>
                   <a:srgbClr val="020C31"/>
                 </a:solidFill>
                 <a:latin typeface="Calibri"/>
               </a:rPr>
               <a:t>Fade to black / section break</a:t>
+            </a:r>
+          </a:p>
+          <a:p>
+            <a:pPr algn="l"/>
+            <a:r>
+              <a:rPr sz="750" b="1">
+                <a:solidFill>
+                  <a:srgbClr val="0E7090"/>
+                </a:solidFill>
+                <a:latin typeface="Calibri"/>
+              </a:rPr>
+              <a:t>N/A - transition only</a:t>
             </a:r>
           </a:p>
         </p:txBody>
@@ -12001,7 +12145,7 @@
           <a:p>
             <a:pPr algn="l"/>
             <a:r>
-              <a:rPr sz="900" b="1">
+              <a:rPr sz="850" b="1">
                 <a:solidFill>
                   <a:srgbClr val="020C31"/>
                 </a:solidFill>
@@ -12013,13 +12157,25 @@
           <a:p>
             <a:pPr algn="l"/>
             <a:r>
-              <a:rPr sz="850" i="1">
+              <a:rPr sz="800" i="1">
                 <a:solidFill>
                   <a:srgbClr val="555555"/>
                 </a:solidFill>
                 <a:latin typeface="Calibri"/>
               </a:rPr>
               <a:t>Orchestration and automation tools now call 5G Network Functions directly.</a:t>
+            </a:r>
+          </a:p>
+          <a:p>
+            <a:pPr algn="l"/>
+            <a:r>
+              <a:rPr sz="750" b="1">
+                <a:solidFill>
+                  <a:srgbClr val="0E7090"/>
+                </a:solidFill>
+                <a:latin typeface="Calibri"/>
+              </a:rPr>
+              <a:t>ASSET: slides/GATE-2/AEGIS_Gate2_Official.pptx, Slide 4 (pipeline cards)</a:t>
             </a:r>
           </a:p>
         </p:txBody>
@@ -12048,7 +12204,7 @@
           <a:p>
             <a:pPr algn="l"/>
             <a:r>
-              <a:rPr sz="900" b="1">
+              <a:rPr sz="850" b="1">
                 <a:solidFill>
                   <a:srgbClr val="020C31"/>
                 </a:solidFill>
@@ -12060,13 +12216,25 @@
           <a:p>
             <a:pPr algn="l"/>
             <a:r>
-              <a:rPr sz="850" i="1">
+              <a:rPr sz="800" i="1">
                 <a:solidFill>
                   <a:srgbClr val="555555"/>
                 </a:solidFill>
                 <a:latin typeface="Calibri"/>
               </a:rPr>
               <a:t>Authentication proves you have the right key.</a:t>
+            </a:r>
+          </a:p>
+          <a:p>
+            <a:pPr algn="l"/>
+            <a:r>
+              <a:rPr sz="750" b="1">
+                <a:solidFill>
+                  <a:srgbClr val="0E7090"/>
+                </a:solidFill>
+                <a:latin typeface="Calibri"/>
+              </a:rPr>
+              <a:t>ASSET: reports/GATE-2/aegis_hook_analogy.png (full graphic)</a:t>
             </a:r>
           </a:p>
         </p:txBody>
@@ -12095,7 +12263,7 @@
           <a:p>
             <a:pPr algn="l"/>
             <a:r>
-              <a:rPr sz="900" b="1">
+              <a:rPr sz="850" b="1">
                 <a:solidFill>
                   <a:srgbClr val="020C31"/>
                 </a:solidFill>
@@ -12107,13 +12275,25 @@
           <a:p>
             <a:pPr algn="l"/>
             <a:r>
-              <a:rPr sz="850" i="1">
+              <a:rPr sz="800" i="1">
                 <a:solidFill>
                   <a:srgbClr val="555555"/>
                 </a:solidFill>
                 <a:latin typeface="Calibri"/>
               </a:rPr>
               <a:t>It never asks whether you're still behaving like yourself.</a:t>
+            </a:r>
+          </a:p>
+          <a:p>
+            <a:pPr algn="l"/>
+            <a:r>
+              <a:rPr sz="750" b="1">
+                <a:solidFill>
+                  <a:srgbClr val="0E7090"/>
+                </a:solidFill>
+                <a:latin typeface="Calibri"/>
+              </a:rPr>
+              <a:t>ASSET: slides/GATE-2/AEGIS_Gate2_Official.pptx, Slide 6 ("THE GAP" panel text)</a:t>
             </a:r>
           </a:p>
         </p:txBody>
@@ -12142,7 +12322,7 @@
           <a:p>
             <a:pPr algn="l"/>
             <a:r>
-              <a:rPr sz="900" b="1">
+              <a:rPr sz="850" b="1">
                 <a:solidFill>
                   <a:srgbClr val="020C31"/>
                 </a:solidFill>
@@ -12154,13 +12334,25 @@
           <a:p>
             <a:pPr algn="l"/>
             <a:r>
-              <a:rPr sz="850" i="1">
+              <a:rPr sz="800" i="1">
                 <a:solidFill>
                   <a:srgbClr val="555555"/>
                 </a:solidFill>
                 <a:latin typeface="Calibri"/>
               </a:rPr>
               <a:t>A compromised or stolen credential can sit undetected for weeks.</a:t>
+            </a:r>
+          </a:p>
+          <a:p>
+            <a:pPr algn="l"/>
+            <a:r>
+              <a:rPr sz="750" b="1">
+                <a:solidFill>
+                  <a:srgbClr val="0E7090"/>
+                </a:solidFill>
+                <a:latin typeface="Calibri"/>
+              </a:rPr>
+              <a:t>NEW: live-action B-roll (operator at screen)</a:t>
             </a:r>
           </a:p>
         </p:txBody>
@@ -12189,7 +12381,7 @@
           <a:p>
             <a:pPr algn="l"/>
             <a:r>
-              <a:rPr sz="900" b="1">
+              <a:rPr sz="850" b="1">
                 <a:solidFill>
                   <a:srgbClr val="020C31"/>
                 </a:solidFill>
@@ -12201,13 +12393,25 @@
           <a:p>
             <a:pPr algn="l"/>
             <a:r>
-              <a:rPr sz="850" i="1">
+              <a:rPr sz="800" i="1">
                 <a:solidFill>
                   <a:srgbClr val="555555"/>
                 </a:solidFill>
                 <a:latin typeface="Calibri"/>
               </a:rPr>
               <a:t>The business cost of a one-time-only identity check.</a:t>
+            </a:r>
+          </a:p>
+          <a:p>
+            <a:pPr algn="l"/>
+            <a:r>
+              <a:rPr sz="750" b="1">
+                <a:solidFill>
+                  <a:srgbClr val="0E7090"/>
+                </a:solidFill>
+                <a:latin typeface="Calibri"/>
+              </a:rPr>
+              <a:t>NEW: graphic - pull from Gate 1 deck's economic/business analysis if available</a:t>
             </a:r>
           </a:p>
         </p:txBody>
@@ -12236,7 +12440,7 @@
           <a:p>
             <a:pPr algn="l"/>
             <a:r>
-              <a:rPr sz="900" b="1">
+              <a:rPr sz="850" b="1">
                 <a:solidFill>
                   <a:srgbClr val="020C31"/>
                 </a:solidFill>
@@ -12248,13 +12452,25 @@
           <a:p>
             <a:pPr algn="l"/>
             <a:r>
-              <a:rPr sz="850" i="1">
+              <a:rPr sz="800" i="1">
                 <a:solidFill>
                   <a:srgbClr val="555555"/>
                 </a:solidFill>
                 <a:latin typeface="Calibri"/>
               </a:rPr>
               <a:t>"There's a better way."</a:t>
+            </a:r>
+          </a:p>
+          <a:p>
+            <a:pPr algn="l"/>
+            <a:r>
+              <a:rPr sz="750" b="1">
+                <a:solidFill>
+                  <a:srgbClr val="0E7090"/>
+                </a:solidFill>
+                <a:latin typeface="Calibri"/>
+              </a:rPr>
+              <a:t>NEW: transition graphic</a:t>
             </a:r>
           </a:p>
         </p:txBody>
@@ -15026,7 +15242,7 @@
           <a:p>
             <a:pPr algn="l"/>
             <a:r>
-              <a:rPr sz="900" b="1">
+              <a:rPr sz="850" b="1">
                 <a:solidFill>
                   <a:srgbClr val="020C31"/>
                 </a:solidFill>
@@ -15038,13 +15254,25 @@
           <a:p>
             <a:pPr algn="l"/>
             <a:r>
-              <a:rPr sz="850" i="1">
+              <a:rPr sz="800" i="1">
                 <a:solidFill>
                   <a:srgbClr val="555555"/>
                 </a:solidFill>
                 <a:latin typeface="Calibri"/>
               </a:rPr>
               <a:t>AEGIS builds a behavioural fingerprint for every agent.</a:t>
+            </a:r>
+          </a:p>
+          <a:p>
+            <a:pPr algn="l"/>
+            <a:r>
+              <a:rPr sz="750" b="1">
+                <a:solidFill>
+                  <a:srgbClr val="0E7090"/>
+                </a:solidFill>
+                <a:latin typeface="Calibri"/>
+              </a:rPr>
+              <a:t>ASSET: assets/architecture.png</a:t>
             </a:r>
           </a:p>
         </p:txBody>
@@ -15073,7 +15301,7 @@
           <a:p>
             <a:pPr algn="l"/>
             <a:r>
-              <a:rPr sz="900" b="1">
+              <a:rPr sz="850" b="1">
                 <a:solidFill>
                   <a:srgbClr val="020C31"/>
                 </a:solidFill>
@@ -15085,13 +15313,25 @@
           <a:p>
             <a:pPr algn="l"/>
             <a:r>
-              <a:rPr sz="850" i="1">
+              <a:rPr sz="800" i="1">
                 <a:solidFill>
                   <a:srgbClr val="555555"/>
                 </a:solidFill>
                 <a:latin typeface="Calibri"/>
               </a:rPr>
               <a:t>OBSERVE - every request is captured: who, what, when, how.</a:t>
+            </a:r>
+          </a:p>
+          <a:p>
+            <a:pPr algn="l"/>
+            <a:r>
+              <a:rPr sz="750" b="1">
+                <a:solidFill>
+                  <a:srgbClr val="0E7090"/>
+                </a:solidFill>
+                <a:latin typeface="Calibri"/>
+              </a:rPr>
+              <a:t>ASSET: slides/GATE-2/AEGIS_Gate2_Official.pptx, Slide 4 (OBSERVE card)</a:t>
             </a:r>
           </a:p>
         </p:txBody>
@@ -15120,7 +15360,7 @@
           <a:p>
             <a:pPr algn="l"/>
             <a:r>
-              <a:rPr sz="900" b="1">
+              <a:rPr sz="850" b="1">
                 <a:solidFill>
                   <a:srgbClr val="020C31"/>
                 </a:solidFill>
@@ -15132,13 +15372,25 @@
           <a:p>
             <a:pPr algn="l"/>
             <a:r>
-              <a:rPr sz="850" i="1">
+              <a:rPr sz="800" i="1">
                 <a:solidFill>
                   <a:srgbClr val="555555"/>
                 </a:solidFill>
                 <a:latin typeface="Calibri"/>
               </a:rPr>
               <a:t>FINGERPRINT - that stream becomes a behavioural profile.</a:t>
+            </a:r>
+          </a:p>
+          <a:p>
+            <a:pPr algn="l"/>
+            <a:r>
+              <a:rPr sz="750" b="1">
+                <a:solidFill>
+                  <a:srgbClr val="0E7090"/>
+                </a:solidFill>
+                <a:latin typeface="Calibri"/>
+              </a:rPr>
+              <a:t>ASSET: slides/GATE-2/AEGIS_Gate2_Official.pptx, Slide 4 (FINGERPRINT card)</a:t>
             </a:r>
           </a:p>
         </p:txBody>
@@ -15167,7 +15419,7 @@
           <a:p>
             <a:pPr algn="l"/>
             <a:r>
-              <a:rPr sz="900" b="1">
+              <a:rPr sz="850" b="1">
                 <a:solidFill>
                   <a:srgbClr val="020C31"/>
                 </a:solidFill>
@@ -15179,13 +15431,25 @@
           <a:p>
             <a:pPr algn="l"/>
             <a:r>
-              <a:rPr sz="850" i="1">
+              <a:rPr sz="800" i="1">
                 <a:solidFill>
                   <a:srgbClr val="555555"/>
                 </a:solidFill>
                 <a:latin typeface="Calibri"/>
               </a:rPr>
               <a:t>SCORE - live behaviour is compared to that profile, in real time.</a:t>
+            </a:r>
+          </a:p>
+          <a:p>
+            <a:pPr algn="l"/>
+            <a:r>
+              <a:rPr sz="750" b="1">
+                <a:solidFill>
+                  <a:srgbClr val="0E7090"/>
+                </a:solidFill>
+                <a:latin typeface="Calibri"/>
+              </a:rPr>
+              <a:t>ASSET: slides/GATE-2/AEGIS_Gate2_Official.pptx, Slide 8 (Scoring: Rules+ML Fused)</a:t>
             </a:r>
           </a:p>
         </p:txBody>
@@ -15214,7 +15478,7 @@
           <a:p>
             <a:pPr algn="l"/>
             <a:r>
-              <a:rPr sz="900" b="1">
+              <a:rPr sz="850" b="1">
                 <a:solidFill>
                   <a:srgbClr val="020C31"/>
                 </a:solidFill>
@@ -15226,13 +15490,25 @@
           <a:p>
             <a:pPr algn="l"/>
             <a:r>
-              <a:rPr sz="850" i="1">
+              <a:rPr sz="800" i="1">
                 <a:solidFill>
                   <a:srgbClr val="555555"/>
                 </a:solidFill>
                 <a:latin typeface="Calibri"/>
               </a:rPr>
               <a:t>DECIDE - pass it, challenge it, or shut it down, instantly.</a:t>
+            </a:r>
+          </a:p>
+          <a:p>
+            <a:pPr algn="l"/>
+            <a:r>
+              <a:rPr sz="750" b="1">
+                <a:solidFill>
+                  <a:srgbClr val="0E7090"/>
+                </a:solidFill>
+                <a:latin typeface="Calibri"/>
+              </a:rPr>
+              <a:t>ASSET: slides/GATE-2/AEGIS_Gate2_Official.pptx, Slide 6 (PASS/STEP-UP/BLOCK pills)</a:t>
             </a:r>
           </a:p>
         </p:txBody>
@@ -15261,7 +15537,7 @@
           <a:p>
             <a:pPr algn="l"/>
             <a:r>
-              <a:rPr sz="900" b="1">
+              <a:rPr sz="850" b="1">
                 <a:solidFill>
                   <a:srgbClr val="020C31"/>
                 </a:solidFill>
@@ -15273,13 +15549,25 @@
           <a:p>
             <a:pPr algn="l"/>
             <a:r>
-              <a:rPr sz="850" i="1">
+              <a:rPr sz="800" i="1">
                 <a:solidFill>
                   <a:srgbClr val="555555"/>
                 </a:solidFill>
                 <a:latin typeface="Calibri"/>
               </a:rPr>
               <a:t>Never trust. Always verify. Continuously.</a:t>
+            </a:r>
+          </a:p>
+          <a:p>
+            <a:pPr algn="l"/>
+            <a:r>
+              <a:rPr sz="750" b="1">
+                <a:solidFill>
+                  <a:srgbClr val="0E7090"/>
+                </a:solidFill>
+                <a:latin typeface="Calibri"/>
+              </a:rPr>
+              <a:t>NEW: text card (quote README's zero-trust framing)</a:t>
             </a:r>
           </a:p>
         </p:txBody>
@@ -18038,7 +18326,7 @@
           <a:p>
             <a:pPr algn="l"/>
             <a:r>
-              <a:rPr sz="900" b="1">
+              <a:rPr sz="850" b="1">
                 <a:solidFill>
                   <a:srgbClr val="020C31"/>
                 </a:solidFill>
@@ -18050,13 +18338,25 @@
           <a:p>
             <a:pPr algn="l"/>
             <a:r>
-              <a:rPr sz="850" i="1">
+              <a:rPr sz="800" i="1">
                 <a:solidFill>
                   <a:srgbClr val="555555"/>
                 </a:solidFill>
                 <a:latin typeface="Calibri"/>
               </a:rPr>
               <a:t>Here it is, live - not a mockup.</a:t>
+            </a:r>
+          </a:p>
+          <a:p>
+            <a:pPr algn="l"/>
+            <a:r>
+              <a:rPr sz="750" b="1">
+                <a:solidFill>
+                  <a:srgbClr val="0E7090"/>
+                </a:solidFill>
+                <a:latin typeface="Calibri"/>
+              </a:rPr>
+              <a:t>ASSET: live screen recording of aegis5gacademy.streamlit.app, OR slides/GATE-2/AEGIS_Live_Demo.mp4</a:t>
             </a:r>
           </a:p>
         </p:txBody>
@@ -18085,7 +18385,7 @@
           <a:p>
             <a:pPr algn="l"/>
             <a:r>
-              <a:rPr sz="900" b="1">
+              <a:rPr sz="850" b="1">
                 <a:solidFill>
                   <a:srgbClr val="020C31"/>
                 </a:solidFill>
@@ -18097,13 +18397,25 @@
           <a:p>
             <a:pPr algn="l"/>
             <a:r>
-              <a:rPr sz="850" i="1">
+              <a:rPr sz="800" i="1">
                 <a:solidFill>
                   <a:srgbClr val="555555"/>
                 </a:solidFill>
                 <a:latin typeface="Calibri"/>
               </a:rPr>
               <a:t>Watch what happens when an agent starts behaving like an attacker.</a:t>
+            </a:r>
+          </a:p>
+          <a:p>
+            <a:pPr algn="l"/>
+            <a:r>
+              <a:rPr sz="750" b="1">
+                <a:solidFill>
+                  <a:srgbClr val="0E7090"/>
+                </a:solidFill>
+                <a:latin typeface="Calibri"/>
+              </a:rPr>
+              <a:t>ASSET: slides/GATE-2/AEGIS_Live_Demo.mp4 (attack-injection segment)</a:t>
             </a:r>
           </a:p>
         </p:txBody>
@@ -18132,7 +18444,7 @@
           <a:p>
             <a:pPr algn="l"/>
             <a:r>
-              <a:rPr sz="900" b="1">
+              <a:rPr sz="850" b="1">
                 <a:solidFill>
                   <a:srgbClr val="020C31"/>
                 </a:solidFill>
@@ -18144,13 +18456,25 @@
           <a:p>
             <a:pPr algn="l"/>
             <a:r>
-              <a:rPr sz="850" i="1">
+              <a:rPr sz="800" i="1">
                 <a:solidFill>
                   <a:srgbClr val="555555"/>
                 </a:solidFill>
                 <a:latin typeface="Calibri"/>
               </a:rPr>
               <a:t>Probing endpoints it's never touched, at a rate it's never used.</a:t>
+            </a:r>
+          </a:p>
+          <a:p>
+            <a:pPr algn="l"/>
+            <a:r>
+              <a:rPr sz="750" b="1">
+                <a:solidFill>
+                  <a:srgbClr val="0E7090"/>
+                </a:solidFill>
+                <a:latin typeface="Calibri"/>
+              </a:rPr>
+              <a:t>ASSET: slides/GATE-2/AEGIS_Live_Demo.mp4 (same segment, continued)</a:t>
             </a:r>
           </a:p>
         </p:txBody>
@@ -18179,7 +18503,7 @@
           <a:p>
             <a:pPr algn="l"/>
             <a:r>
-              <a:rPr sz="900" b="1">
+              <a:rPr sz="850" b="1">
                 <a:solidFill>
                   <a:srgbClr val="020C31"/>
                 </a:solidFill>
@@ -18191,13 +18515,25 @@
           <a:p>
             <a:pPr algn="l"/>
             <a:r>
-              <a:rPr sz="850" i="1">
+              <a:rPr sz="800" i="1">
                 <a:solidFill>
                   <a:srgbClr val="555555"/>
                 </a:solidFill>
                 <a:latin typeface="Calibri"/>
               </a:rPr>
               <a:t>AEGIS explains exactly why, in language a security analyst can act on.</a:t>
+            </a:r>
+          </a:p>
+          <a:p>
+            <a:pPr algn="l"/>
+            <a:r>
+              <a:rPr sz="750" b="1">
+                <a:solidFill>
+                  <a:srgbClr val="0E7090"/>
+                </a:solidFill>
+                <a:latin typeface="Calibri"/>
+              </a:rPr>
+              <a:t>ASSET: live screen recording - incident inspector panel</a:t>
             </a:r>
           </a:p>
         </p:txBody>
@@ -18226,7 +18562,7 @@
           <a:p>
             <a:pPr algn="l"/>
             <a:r>
-              <a:rPr sz="900" b="1">
+              <a:rPr sz="850" b="1">
                 <a:solidFill>
                   <a:srgbClr val="020C31"/>
                 </a:solidFill>
@@ -18238,13 +18574,25 @@
           <a:p>
             <a:pPr algn="l"/>
             <a:r>
-              <a:rPr sz="850" i="1">
+              <a:rPr sz="800" i="1">
                 <a:solidFill>
                   <a:srgbClr val="555555"/>
                 </a:solidFill>
                 <a:latin typeface="Calibri"/>
               </a:rPr>
               <a:t>And shuts it down before real damage is done.</a:t>
+            </a:r>
+          </a:p>
+          <a:p>
+            <a:pPr algn="l"/>
+            <a:r>
+              <a:rPr sz="750" b="1">
+                <a:solidFill>
+                  <a:srgbClr val="0E7090"/>
+                </a:solidFill>
+                <a:latin typeface="Calibri"/>
+              </a:rPr>
+              <a:t>ASSET: slides/GATE-2/AEGIS_Live_Demo.mp4 (decision moment)</a:t>
             </a:r>
           </a:p>
         </p:txBody>
@@ -18273,7 +18621,7 @@
           <a:p>
             <a:pPr algn="l"/>
             <a:r>
-              <a:rPr sz="900" b="1">
+              <a:rPr sz="850" b="1">
                 <a:solidFill>
                   <a:srgbClr val="020C31"/>
                 </a:solidFill>
@@ -18285,13 +18633,25 @@
           <a:p>
             <a:pPr algn="l"/>
             <a:r>
-              <a:rPr sz="850" i="1">
+              <a:rPr sz="800" i="1">
                 <a:solidFill>
                   <a:srgbClr val="555555"/>
                 </a:solidFill>
                 <a:latin typeface="Calibri"/>
               </a:rPr>
               <a:t>This is the difference AEGIS makes.</a:t>
+            </a:r>
+          </a:p>
+          <a:p>
+            <a:pPr algn="l"/>
+            <a:r>
+              <a:rPr sz="750" b="1">
+                <a:solidFill>
+                  <a:srgbClr val="0E7090"/>
+                </a:solidFill>
+                <a:latin typeface="Calibri"/>
+              </a:rPr>
+              <a:t>ASSET: slides/GATE-2/AEGIS_Live_Demo.mp4 (before/after segment)</a:t>
             </a:r>
           </a:p>
         </p:txBody>
@@ -21029,7 +21389,7 @@
           <a:p>
             <a:pPr algn="l"/>
             <a:r>
-              <a:rPr sz="900" b="1">
+              <a:rPr sz="850" b="1">
                 <a:solidFill>
                   <a:srgbClr val="020C31"/>
                 </a:solidFill>
@@ -21041,13 +21401,25 @@
           <a:p>
             <a:pPr algn="l"/>
             <a:r>
-              <a:rPr sz="850" i="1">
+              <a:rPr sz="800" i="1">
                 <a:solidFill>
                   <a:srgbClr val="555555"/>
                 </a:solidFill>
                 <a:latin typeface="Calibri"/>
               </a:rPr>
               <a:t>We didn't stop at simulation.</a:t>
+            </a:r>
+          </a:p>
+          <a:p>
+            <a:pPr algn="l"/>
+            <a:r>
+              <a:rPr sz="750" b="1">
+                <a:solidFill>
+                  <a:srgbClr val="0E7090"/>
+                </a:solidFill>
+                <a:latin typeface="Calibri"/>
+              </a:rPr>
+              <a:t>NEW: live screen recording (docker compose up on open5gs-testbed)</a:t>
             </a:r>
           </a:p>
         </p:txBody>
@@ -21076,7 +21448,7 @@
           <a:p>
             <a:pPr algn="l"/>
             <a:r>
-              <a:rPr sz="900" b="1">
+              <a:rPr sz="850" b="1">
                 <a:solidFill>
                   <a:srgbClr val="020C31"/>
                 </a:solidFill>
@@ -21088,13 +21460,25 @@
           <a:p>
             <a:pPr algn="l"/>
             <a:r>
-              <a:rPr sz="850" i="1">
+              <a:rPr sz="800" i="1">
                 <a:solidFill>
                   <a:srgbClr val="555555"/>
                 </a:solidFill>
                 <a:latin typeface="Calibri"/>
               </a:rPr>
               <a:t>We built a real 5G core.</a:t>
+            </a:r>
+          </a:p>
+          <a:p>
+            <a:pPr algn="l"/>
+            <a:r>
+              <a:rPr sz="750" b="1">
+                <a:solidFill>
+                  <a:srgbClr val="0E7090"/>
+                </a:solidFill>
+                <a:latin typeface="Calibri"/>
+              </a:rPr>
+              <a:t>ASSET: slides/GATE-2/AEGIS_Gate2_Official.pptx, Slide 17 (Real M2M/API-gateway diagram)</a:t>
             </a:r>
           </a:p>
         </p:txBody>
@@ -21123,7 +21507,7 @@
           <a:p>
             <a:pPr algn="l"/>
             <a:r>
-              <a:rPr sz="900" b="1">
+              <a:rPr sz="850" b="1">
                 <a:solidFill>
                   <a:srgbClr val="020C31"/>
                 </a:solidFill>
@@ -21135,13 +21519,25 @@
           <a:p>
             <a:pPr algn="l"/>
             <a:r>
-              <a:rPr sz="850" i="1">
+              <a:rPr sz="800" i="1">
                 <a:solidFill>
                   <a:srgbClr val="555555"/>
                 </a:solidFill>
                 <a:latin typeface="Calibri"/>
               </a:rPr>
               <a:t>Connected a real device to it.</a:t>
+            </a:r>
+          </a:p>
+          <a:p>
+            <a:pPr algn="l"/>
+            <a:r>
+              <a:rPr sz="750" b="1">
+                <a:solidFill>
+                  <a:srgbClr val="0E7090"/>
+                </a:solidFill>
+                <a:latin typeface="Calibri"/>
+              </a:rPr>
+              <a:t>NEW: live screen recording (docker logs nr_ue - real UE registration)</a:t>
             </a:r>
           </a:p>
         </p:txBody>
@@ -21170,7 +21566,7 @@
           <a:p>
             <a:pPr algn="l"/>
             <a:r>
-              <a:rPr sz="900" b="1">
+              <a:rPr sz="850" b="1">
                 <a:solidFill>
                   <a:srgbClr val="020C31"/>
                 </a:solidFill>
@@ -21182,13 +21578,25 @@
           <a:p>
             <a:pPr algn="l"/>
             <a:r>
-              <a:rPr sz="850" i="1">
+              <a:rPr sz="800" i="1">
                 <a:solidFill>
                   <a:srgbClr val="555555"/>
                 </a:solidFill>
                 <a:latin typeface="Calibri"/>
               </a:rPr>
               <a:t>And tested AEGIS against real network traffic.</a:t>
+            </a:r>
+          </a:p>
+          <a:p>
+            <a:pPr algn="l"/>
+            <a:r>
+              <a:rPr sz="750" b="1">
+                <a:solidFill>
+                  <a:srgbClr val="0E7090"/>
+                </a:solidFill>
+                <a:latin typeface="Calibri"/>
+              </a:rPr>
+              <a:t>ASSET: reports/GATE-3/real_sbi_capture.csv (screenshot/graphic)</a:t>
             </a:r>
           </a:p>
         </p:txBody>
@@ -21217,7 +21625,7 @@
           <a:p>
             <a:pPr algn="l"/>
             <a:r>
-              <a:rPr sz="900" b="1">
+              <a:rPr sz="850" b="1">
                 <a:solidFill>
                   <a:srgbClr val="020C31"/>
                 </a:solidFill>
@@ -21229,13 +21637,25 @@
           <a:p>
             <a:pPr algn="l"/>
             <a:r>
-              <a:rPr sz="850" i="1">
+              <a:rPr sz="800" i="1">
                 <a:solidFill>
                   <a:srgbClr val="555555"/>
                 </a:solidFill>
                 <a:latin typeface="Calibri"/>
               </a:rPr>
               <a:t>The exact same detection code. No changes. It worked.</a:t>
+            </a:r>
+          </a:p>
+          <a:p>
+            <a:pPr algn="l"/>
+            <a:r>
+              <a:rPr sz="750" b="1">
+                <a:solidFill>
+                  <a:srgbClr val="0E7090"/>
+                </a:solidFill>
+                <a:latin typeface="Calibri"/>
+              </a:rPr>
+              <a:t>NEW: graphic from validate_real_traffic_detection.py output (2/2 BLOCK result)</a:t>
             </a:r>
           </a:p>
         </p:txBody>
@@ -21264,7 +21684,7 @@
           <a:p>
             <a:pPr algn="l"/>
             <a:r>
-              <a:rPr sz="900" b="1">
+              <a:rPr sz="850" b="1">
                 <a:solidFill>
                   <a:srgbClr val="020C31"/>
                 </a:solidFill>
@@ -21276,13 +21696,25 @@
           <a:p>
             <a:pPr algn="l"/>
             <a:r>
-              <a:rPr sz="850" i="1">
+              <a:rPr sz="800" i="1">
                 <a:solidFill>
                   <a:srgbClr val="555555"/>
                 </a:solidFill>
                 <a:latin typeface="Calibri"/>
               </a:rPr>
               <a:t>Benchmarked, not just claimed.</a:t>
+            </a:r>
+          </a:p>
+          <a:p>
+            <a:pPr algn="l"/>
+            <a:r>
+              <a:rPr sz="750" b="1">
+                <a:solidFill>
+                  <a:srgbClr val="0E7090"/>
+                </a:solidFill>
+                <a:latin typeface="Calibri"/>
+              </a:rPr>
+              <a:t>ASSET: reports/aegis_eval.png, updated with Gate 3 numbers</a:t>
             </a:r>
           </a:p>
         </p:txBody>
@@ -24100,7 +24532,7 @@
           <a:p>
             <a:pPr algn="l"/>
             <a:r>
-              <a:rPr sz="900" b="1">
+              <a:rPr sz="850" b="1">
                 <a:solidFill>
                   <a:srgbClr val="020C31"/>
                 </a:solidFill>
@@ -24112,13 +24544,25 @@
           <a:p>
             <a:pPr algn="l"/>
             <a:r>
-              <a:rPr sz="850" i="1">
+              <a:rPr sz="800" i="1">
                 <a:solidFill>
                   <a:srgbClr val="555555"/>
                 </a:solidFill>
                 <a:latin typeface="Calibri"/>
               </a:rPr>
               <a:t>Every decision AEGIS makes comes with a plain-language reason.</a:t>
+            </a:r>
+          </a:p>
+          <a:p>
+            <a:pPr algn="l"/>
+            <a:r>
+              <a:rPr sz="750" b="1">
+                <a:solidFill>
+                  <a:srgbClr val="0E7090"/>
+                </a:solidFill>
+                <a:latin typeface="Calibri"/>
+              </a:rPr>
+              <a:t>NEW: text card</a:t>
             </a:r>
           </a:p>
         </p:txBody>
@@ -24147,7 +24591,7 @@
           <a:p>
             <a:pPr algn="l"/>
             <a:r>
-              <a:rPr sz="900" b="1">
+              <a:rPr sz="850" b="1">
                 <a:solidFill>
                   <a:srgbClr val="020C31"/>
                 </a:solidFill>
@@ -24159,13 +24603,25 @@
           <a:p>
             <a:pPr algn="l"/>
             <a:r>
-              <a:rPr sz="850" i="1">
+              <a:rPr sz="800" i="1">
                 <a:solidFill>
                   <a:srgbClr val="555555"/>
                 </a:solidFill>
                 <a:latin typeface="Calibri"/>
               </a:rPr>
               <a:t>No guessing at why an alert fired.</a:t>
+            </a:r>
+          </a:p>
+          <a:p>
+            <a:pPr algn="l"/>
+            <a:r>
+              <a:rPr sz="750" b="1">
+                <a:solidFill>
+                  <a:srgbClr val="0E7090"/>
+                </a:solidFill>
+                <a:latin typeface="Calibri"/>
+              </a:rPr>
+              <a:t>ASSET: live screen recording - incident inspector panel (reuse from scene 5)</a:t>
             </a:r>
           </a:p>
         </p:txBody>
@@ -24194,7 +24650,7 @@
           <a:p>
             <a:pPr algn="l"/>
             <a:r>
-              <a:rPr sz="900" b="1">
+              <a:rPr sz="850" b="1">
                 <a:solidFill>
                   <a:srgbClr val="020C31"/>
                 </a:solidFill>
@@ -24206,13 +24662,25 @@
           <a:p>
             <a:pPr algn="l"/>
             <a:r>
-              <a:rPr sz="850" i="1">
+              <a:rPr sz="800" i="1">
                 <a:solidFill>
                   <a:srgbClr val="555555"/>
                 </a:solidFill>
                 <a:latin typeface="Calibri"/>
               </a:rPr>
               <a:t>Subscriber identifiers are protected, never stored raw.</a:t>
+            </a:r>
+          </a:p>
+          <a:p>
+            <a:pPr algn="l"/>
+            <a:r>
+              <a:rPr sz="750" b="1">
+                <a:solidFill>
+                  <a:srgbClr val="0E7090"/>
+                </a:solidFill>
+                <a:latin typeface="Calibri"/>
+              </a:rPr>
+              <a:t>NEW: graphic - concept from docs/GATE-3/real-vs-synthetic-dashboard-implications.md (privacy section)</a:t>
             </a:r>
           </a:p>
         </p:txBody>
@@ -24241,13 +24709,25 @@
           <a:p>
             <a:pPr algn="l"/>
             <a:r>
-              <a:rPr sz="900" b="1">
+              <a:rPr sz="850" b="1">
                 <a:solidFill>
                   <a:srgbClr val="020C31"/>
                 </a:solidFill>
                 <a:latin typeface="Calibri"/>
               </a:rPr>
               <a:t>[STACCO - hard cut]</a:t>
+            </a:r>
+          </a:p>
+          <a:p>
+            <a:pPr algn="l"/>
+            <a:r>
+              <a:rPr sz="750" b="1">
+                <a:solidFill>
+                  <a:srgbClr val="0E7090"/>
+                </a:solidFill>
+                <a:latin typeface="Calibri"/>
+              </a:rPr>
+              <a:t>N/A - transition only</a:t>
             </a:r>
           </a:p>
         </p:txBody>
@@ -24276,7 +24756,7 @@
           <a:p>
             <a:pPr algn="l"/>
             <a:r>
-              <a:rPr sz="900" b="1">
+              <a:rPr sz="850" b="1">
                 <a:solidFill>
                   <a:srgbClr val="020C31"/>
                 </a:solidFill>
@@ -24288,13 +24768,25 @@
           <a:p>
             <a:pPr algn="l"/>
             <a:r>
-              <a:rPr sz="850" i="1">
+              <a:rPr sz="800" i="1">
                 <a:solidFill>
                   <a:srgbClr val="555555"/>
                 </a:solidFill>
                 <a:latin typeface="Calibri"/>
               </a:rPr>
               <a:t>In production, AEGIS runs at the network edge - close to the core, low latency.</a:t>
+            </a:r>
+          </a:p>
+          <a:p>
+            <a:pPr algn="l"/>
+            <a:r>
+              <a:rPr sz="750" b="1">
+                <a:solidFill>
+                  <a:srgbClr val="0E7090"/>
+                </a:solidFill>
+                <a:latin typeface="Calibri"/>
+              </a:rPr>
+              <a:t>NEW: graphic - concept from docs/GATE-3/real-vs-synthetic-dashboard-implications.md (production section)</a:t>
             </a:r>
           </a:p>
         </p:txBody>
@@ -24323,7 +24815,7 @@
           <a:p>
             <a:pPr algn="l"/>
             <a:r>
-              <a:rPr sz="900" b="1">
+              <a:rPr sz="850" b="1">
                 <a:solidFill>
                   <a:srgbClr val="020C31"/>
                 </a:solidFill>
@@ -24335,13 +24827,25 @@
           <a:p>
             <a:pPr algn="l"/>
             <a:r>
-              <a:rPr sz="850" i="1">
+              <a:rPr sz="800" i="1">
                 <a:solidFill>
                   <a:srgbClr val="555555"/>
                 </a:solidFill>
                 <a:latin typeface="Calibri"/>
               </a:rPr>
               <a:t>Security that explains itself, built to be trusted, not just deployed.</a:t>
+            </a:r>
+          </a:p>
+          <a:p>
+            <a:pPr algn="l"/>
+            <a:r>
+              <a:rPr sz="750" b="1">
+                <a:solidFill>
+                  <a:srgbClr val="0E7090"/>
+                </a:solidFill>
+                <a:latin typeface="Calibri"/>
+              </a:rPr>
+              <a:t>NEW: text card</a:t>
             </a:r>
           </a:p>
         </p:txBody>
@@ -27092,7 +27596,7 @@
           <a:p>
             <a:pPr algn="l"/>
             <a:r>
-              <a:rPr sz="900" b="1">
+              <a:rPr sz="850" b="1">
                 <a:solidFill>
                   <a:srgbClr val="020C31"/>
                 </a:solidFill>
@@ -27104,13 +27608,25 @@
           <a:p>
             <a:pPr algn="l"/>
             <a:r>
-              <a:rPr sz="850" i="1">
+              <a:rPr sz="800" i="1">
                 <a:solidFill>
                   <a:srgbClr val="555555"/>
                 </a:solidFill>
                 <a:latin typeface="Calibri"/>
               </a:rPr>
               <a:t>Recap montage - the whole story in five seconds.</a:t>
+            </a:r>
+          </a:p>
+          <a:p>
+            <a:pPr algn="l"/>
+            <a:r>
+              <a:rPr sz="750" b="1">
+                <a:solidFill>
+                  <a:srgbClr val="0E7090"/>
+                </a:solidFill>
+                <a:latin typeface="Calibri"/>
+              </a:rPr>
+              <a:t>ASSET: re-cut of scenes 1, 5, 6 above</a:t>
             </a:r>
           </a:p>
         </p:txBody>
@@ -27139,7 +27655,7 @@
           <a:p>
             <a:pPr algn="l"/>
             <a:r>
-              <a:rPr sz="900" b="1">
+              <a:rPr sz="850" b="1">
                 <a:solidFill>
                   <a:srgbClr val="020C31"/>
                 </a:solidFill>
@@ -27151,13 +27667,25 @@
           <a:p>
             <a:pPr algn="l"/>
             <a:r>
-              <a:rPr sz="850" i="1">
+              <a:rPr sz="800" i="1">
                 <a:solidFill>
                   <a:srgbClr val="555555"/>
                 </a:solidFill>
                 <a:latin typeface="Calibri"/>
               </a:rPr>
               <a:t>"Trust can't be a one-time check."</a:t>
+            </a:r>
+          </a:p>
+          <a:p>
+            <a:pPr algn="l"/>
+            <a:r>
+              <a:rPr sz="750" b="1">
+                <a:solidFill>
+                  <a:srgbClr val="0E7090"/>
+                </a:solidFill>
+                <a:latin typeface="Calibri"/>
+              </a:rPr>
+              <a:t>NEW: text card</a:t>
             </a:r>
           </a:p>
         </p:txBody>
@@ -27186,7 +27714,7 @@
           <a:p>
             <a:pPr algn="l"/>
             <a:r>
-              <a:rPr sz="900" b="1">
+              <a:rPr sz="850" b="1">
                 <a:solidFill>
                   <a:srgbClr val="020C31"/>
                 </a:solidFill>
@@ -27198,13 +27726,25 @@
           <a:p>
             <a:pPr algn="l"/>
             <a:r>
-              <a:rPr sz="850" i="1">
+              <a:rPr sz="800" i="1">
                 <a:solidFill>
                   <a:srgbClr val="555555"/>
                 </a:solidFill>
                 <a:latin typeface="Calibri"/>
               </a:rPr>
               <a:t>"It has to be continuous."</a:t>
+            </a:r>
+          </a:p>
+          <a:p>
+            <a:pPr algn="l"/>
+            <a:r>
+              <a:rPr sz="750" b="1">
+                <a:solidFill>
+                  <a:srgbClr val="0E7090"/>
+                </a:solidFill>
+                <a:latin typeface="Calibri"/>
+              </a:rPr>
+              <a:t>NEW: text card</a:t>
             </a:r>
           </a:p>
         </p:txBody>
@@ -27233,7 +27773,7 @@
           <a:p>
             <a:pPr algn="l"/>
             <a:r>
-              <a:rPr sz="900" b="1">
+              <a:rPr sz="850" b="1">
                 <a:solidFill>
                   <a:srgbClr val="020C31"/>
                 </a:solidFill>
@@ -27245,13 +27785,25 @@
           <a:p>
             <a:pPr algn="l"/>
             <a:r>
-              <a:rPr sz="850" i="1">
+              <a:rPr sz="800" i="1">
                 <a:solidFill>
                   <a:srgbClr val="555555"/>
                 </a:solidFill>
                 <a:latin typeface="Calibri"/>
               </a:rPr>
               <a:t>aegis5gacademy.streamlit.app - see it live.</a:t>
+            </a:r>
+          </a:p>
+          <a:p>
+            <a:pPr algn="l"/>
+            <a:r>
+              <a:rPr sz="750" b="1">
+                <a:solidFill>
+                  <a:srgbClr val="0E7090"/>
+                </a:solidFill>
+                <a:latin typeface="Calibri"/>
+              </a:rPr>
+              <a:t>ASSET: slides/GATE-2/AEGIS_Gate2_Official.pptx, Slide 19 (Thank You, has GitHub/dashboard links)</a:t>
             </a:r>
           </a:p>
         </p:txBody>
@@ -27280,7 +27832,7 @@
           <a:p>
             <a:pPr algn="l"/>
             <a:r>
-              <a:rPr sz="900" b="1">
+              <a:rPr sz="850" b="1">
                 <a:solidFill>
                   <a:srgbClr val="020C31"/>
                 </a:solidFill>
@@ -27292,13 +27844,25 @@
           <a:p>
             <a:pPr algn="l"/>
             <a:r>
-              <a:rPr sz="850" i="1">
+              <a:rPr sz="800" i="1">
                 <a:solidFill>
                   <a:srgbClr val="555555"/>
                 </a:solidFill>
                 <a:latin typeface="Calibri"/>
               </a:rPr>
               <a:t>5G Academy 2026, in partnership with Fastweb and Vodafone.</a:t>
+            </a:r>
+          </a:p>
+          <a:p>
+            <a:pPr algn="l"/>
+            <a:r>
+              <a:rPr sz="750" b="1">
+                <a:solidFill>
+                  <a:srgbClr val="0E7090"/>
+                </a:solidFill>
+                <a:latin typeface="Calibri"/>
+              </a:rPr>
+              <a:t>ASSET: slides/GATE-2/AEGIS_Gate2_Official.pptx, Slide 1 (branding)</a:t>
             </a:r>
           </a:p>
         </p:txBody>
@@ -27327,7 +27891,7 @@
           <a:p>
             <a:pPr algn="l"/>
             <a:r>
-              <a:rPr sz="900" b="1">
+              <a:rPr sz="850" b="1">
                 <a:solidFill>
                   <a:srgbClr val="020C31"/>
                 </a:solidFill>
@@ -27339,13 +27903,25 @@
           <a:p>
             <a:pPr algn="l"/>
             <a:r>
-              <a:rPr sz="850" i="1">
+              <a:rPr sz="800" i="1">
                 <a:solidFill>
                   <a:srgbClr val="555555"/>
                 </a:solidFill>
                 <a:latin typeface="Calibri"/>
               </a:rPr>
               <a:t>Thank you.</a:t>
+            </a:r>
+          </a:p>
+          <a:p>
+            <a:pPr algn="l"/>
+            <a:r>
+              <a:rPr sz="750" b="1">
+                <a:solidFill>
+                  <a:srgbClr val="0E7090"/>
+                </a:solidFill>
+                <a:latin typeface="Calibri"/>
+              </a:rPr>
+              <a:t>N/A - transition only</a:t>
             </a:r>
           </a:p>
         </p:txBody>

--- a/slides/GATE-3/AEGIS_Gate3_Storyboard.pptx
+++ b/slides/GATE-3/AEGIS_Gate3_Storyboard.pptx
@@ -5811,7 +5811,7 @@
         </p:nvSpPr>
         <p:spPr>
           <a:xfrm>
-            <a:off x="365811" y="239475"/>
+            <a:off x="73342" y="100951"/>
             <a:ext cx="328295" cy="187325"/>
           </a:xfrm>
           <a:prstGeom prst="rect">
@@ -5833,7 +5833,7 @@
               </a:spcAft>
             </a:pPr>
             <a:r>
-              <a:rPr lang="en-US" sz="1100" kern="1200" spc="-40">
+              <a:rPr lang="en-US" sz="1100" kern="1200" spc="-40" dirty="0">
                 <a:solidFill>
                   <a:srgbClr val="9B9B9B"/>
                 </a:solidFill>
@@ -5844,7 +5844,7 @@
               </a:rPr>
               <a:t>Title: AEGIS - Zero-Trust Identity for AI Agents</a:t>
             </a:r>
-            <a:endParaRPr lang="en-US" sz="1100">
+            <a:endParaRPr lang="en-US" sz="1100" dirty="0">
               <a:effectLst/>
               <a:latin typeface="Arial" panose="020B0604020202020204" pitchFamily="34" charset="0"/>
               <a:ea typeface="Times New Roman" panose="02020603050405020304" pitchFamily="18" charset="0"/>
@@ -5995,7 +5995,7 @@
           <a:noFill/>
         </p:spPr>
         <p:txBody>
-          <a:bodyPr wrap="square" lIns="0" rIns="0" tIns="0" bIns="0">
+          <a:bodyPr wrap="square" lIns="0" tIns="0" rIns="0" bIns="0">
             <a:spAutoFit/>
           </a:bodyPr>
           <a:lstStyle/>
@@ -6054,7 +6054,7 @@
           <a:noFill/>
         </p:spPr>
         <p:txBody>
-          <a:bodyPr wrap="square" lIns="0" rIns="0" tIns="0" bIns="0">
+          <a:bodyPr wrap="square" lIns="0" tIns="0" rIns="0" bIns="0">
             <a:spAutoFit/>
           </a:bodyPr>
           <a:lstStyle/>
@@ -6113,7 +6113,7 @@
           <a:noFill/>
         </p:spPr>
         <p:txBody>
-          <a:bodyPr wrap="square" lIns="0" rIns="0" tIns="0" bIns="0">
+          <a:bodyPr wrap="square" lIns="0" tIns="0" rIns="0" bIns="0">
             <a:spAutoFit/>
           </a:bodyPr>
           <a:lstStyle/>
@@ -6172,7 +6172,7 @@
           <a:noFill/>
         </p:spPr>
         <p:txBody>
-          <a:bodyPr wrap="square" lIns="0" rIns="0" tIns="0" bIns="0">
+          <a:bodyPr wrap="square" lIns="0" tIns="0" rIns="0" bIns="0">
             <a:spAutoFit/>
           </a:bodyPr>
           <a:lstStyle/>
@@ -6231,7 +6231,7 @@
           <a:noFill/>
         </p:spPr>
         <p:txBody>
-          <a:bodyPr wrap="square" lIns="0" rIns="0" tIns="0" bIns="0">
+          <a:bodyPr wrap="square" lIns="0" tIns="0" rIns="0" bIns="0">
             <a:spAutoFit/>
           </a:bodyPr>
           <a:lstStyle/>
@@ -6290,7 +6290,7 @@
           <a:noFill/>
         </p:spPr>
         <p:txBody>
-          <a:bodyPr wrap="square" lIns="0" rIns="0" tIns="0" bIns="0">
+          <a:bodyPr wrap="square" lIns="0" tIns="0" rIns="0" bIns="0">
             <a:spAutoFit/>
           </a:bodyPr>
           <a:lstStyle/>
@@ -6332,6 +6332,54 @@
           </a:p>
         </p:txBody>
       </p:sp>
+      <p:pic>
+        <p:nvPicPr>
+          <p:cNvPr id="71" name="Picture 70" descr="architecture.png"/>
+          <p:cNvPicPr>
+            <a:picLocks noChangeAspect="1"/>
+          </p:cNvPicPr>
+          <p:nvPr/>
+        </p:nvPicPr>
+        <p:blipFill>
+          <a:blip r:embed="rId3"/>
+          <a:stretch>
+            <a:fillRect/>
+          </a:stretch>
+        </p:blipFill>
+        <p:spPr>
+          <a:xfrm>
+            <a:off x="8083712" y="696595"/>
+            <a:ext cx="1490655" cy="2070100"/>
+          </a:xfrm>
+          <a:prstGeom prst="rect">
+            <a:avLst/>
+          </a:prstGeom>
+        </p:spPr>
+      </p:pic>
+      <p:pic>
+        <p:nvPicPr>
+          <p:cNvPr id="72" name="Picture 71" descr="aegis_hook_analogy.png"/>
+          <p:cNvPicPr>
+            <a:picLocks noChangeAspect="1"/>
+          </p:cNvPicPr>
+          <p:nvPr/>
+        </p:nvPicPr>
+        <p:blipFill>
+          <a:blip r:embed="rId4"/>
+          <a:stretch>
+            <a:fillRect/>
+          </a:stretch>
+        </p:blipFill>
+        <p:spPr>
+          <a:xfrm>
+            <a:off x="237490" y="4608217"/>
+            <a:ext cx="3187700" cy="723856"/>
+          </a:xfrm>
+          <a:prstGeom prst="rect">
+            <a:avLst/>
+          </a:prstGeom>
+        </p:spPr>
+      </p:pic>
     </p:spTree>
     <p:extLst>
       <p:ext uri="{BB962C8B-B14F-4D97-AF65-F5344CB8AC3E}">
@@ -9058,7 +9106,7 @@
           <a:noFill/>
         </p:spPr>
         <p:txBody>
-          <a:bodyPr wrap="square" lIns="0" rIns="0" tIns="0" bIns="0">
+          <a:bodyPr wrap="square" lIns="0" tIns="0" rIns="0" bIns="0">
             <a:spAutoFit/>
           </a:bodyPr>
           <a:lstStyle/>
@@ -9117,7 +9165,7 @@
           <a:noFill/>
         </p:spPr>
         <p:txBody>
-          <a:bodyPr wrap="square" lIns="0" rIns="0" tIns="0" bIns="0">
+          <a:bodyPr wrap="square" lIns="0" tIns="0" rIns="0" bIns="0">
             <a:spAutoFit/>
           </a:bodyPr>
           <a:lstStyle/>
@@ -9176,7 +9224,7 @@
           <a:noFill/>
         </p:spPr>
         <p:txBody>
-          <a:bodyPr wrap="square" lIns="0" rIns="0" tIns="0" bIns="0">
+          <a:bodyPr wrap="square" lIns="0" tIns="0" rIns="0" bIns="0">
             <a:spAutoFit/>
           </a:bodyPr>
           <a:lstStyle/>
@@ -9235,7 +9283,7 @@
           <a:noFill/>
         </p:spPr>
         <p:txBody>
-          <a:bodyPr wrap="square" lIns="0" rIns="0" tIns="0" bIns="0">
+          <a:bodyPr wrap="square" lIns="0" tIns="0" rIns="0" bIns="0">
             <a:spAutoFit/>
           </a:bodyPr>
           <a:lstStyle/>
@@ -9294,7 +9342,7 @@
           <a:noFill/>
         </p:spPr>
         <p:txBody>
-          <a:bodyPr wrap="square" lIns="0" rIns="0" tIns="0" bIns="0">
+          <a:bodyPr wrap="square" lIns="0" tIns="0" rIns="0" bIns="0">
             <a:spAutoFit/>
           </a:bodyPr>
           <a:lstStyle/>
@@ -9353,7 +9401,7 @@
           <a:noFill/>
         </p:spPr>
         <p:txBody>
-          <a:bodyPr wrap="square" lIns="0" rIns="0" tIns="0" bIns="0">
+          <a:bodyPr wrap="square" lIns="0" tIns="0" rIns="0" bIns="0">
             <a:spAutoFit/>
           </a:bodyPr>
           <a:lstStyle/>
@@ -9383,6 +9431,30 @@
           </a:p>
         </p:txBody>
       </p:sp>
+      <p:pic>
+        <p:nvPicPr>
+          <p:cNvPr id="71" name="Picture 70" descr="architecture.png"/>
+          <p:cNvPicPr>
+            <a:picLocks noChangeAspect="1"/>
+          </p:cNvPicPr>
+          <p:nvPr/>
+        </p:nvPicPr>
+        <p:blipFill>
+          <a:blip r:embed="rId3"/>
+          <a:stretch>
+            <a:fillRect/>
+          </a:stretch>
+        </p:blipFill>
+        <p:spPr>
+          <a:xfrm>
+            <a:off x="4578512" y="696595"/>
+            <a:ext cx="1490655" cy="2070100"/>
+          </a:xfrm>
+          <a:prstGeom prst="rect">
+            <a:avLst/>
+          </a:prstGeom>
+        </p:spPr>
+      </p:pic>
     </p:spTree>
     <p:extLst>
       <p:ext uri="{BB962C8B-B14F-4D97-AF65-F5344CB8AC3E}">
@@ -12138,7 +12210,7 @@
           <a:noFill/>
         </p:spPr>
         <p:txBody>
-          <a:bodyPr wrap="square" lIns="0" rIns="0" tIns="0" bIns="0">
+          <a:bodyPr wrap="square" lIns="0" tIns="0" rIns="0" bIns="0">
             <a:spAutoFit/>
           </a:bodyPr>
           <a:lstStyle/>
@@ -12197,7 +12269,7 @@
           <a:noFill/>
         </p:spPr>
         <p:txBody>
-          <a:bodyPr wrap="square" lIns="0" rIns="0" tIns="0" bIns="0">
+          <a:bodyPr wrap="square" lIns="0" tIns="0" rIns="0" bIns="0">
             <a:spAutoFit/>
           </a:bodyPr>
           <a:lstStyle/>
@@ -12256,7 +12328,7 @@
           <a:noFill/>
         </p:spPr>
         <p:txBody>
-          <a:bodyPr wrap="square" lIns="0" rIns="0" tIns="0" bIns="0">
+          <a:bodyPr wrap="square" lIns="0" tIns="0" rIns="0" bIns="0">
             <a:spAutoFit/>
           </a:bodyPr>
           <a:lstStyle/>
@@ -12315,7 +12387,7 @@
           <a:noFill/>
         </p:spPr>
         <p:txBody>
-          <a:bodyPr wrap="square" lIns="0" rIns="0" tIns="0" bIns="0">
+          <a:bodyPr wrap="square" lIns="0" tIns="0" rIns="0" bIns="0">
             <a:spAutoFit/>
           </a:bodyPr>
           <a:lstStyle/>
@@ -12374,7 +12446,7 @@
           <a:noFill/>
         </p:spPr>
         <p:txBody>
-          <a:bodyPr wrap="square" lIns="0" rIns="0" tIns="0" bIns="0">
+          <a:bodyPr wrap="square" lIns="0" tIns="0" rIns="0" bIns="0">
             <a:spAutoFit/>
           </a:bodyPr>
           <a:lstStyle/>
@@ -12433,7 +12505,7 @@
           <a:noFill/>
         </p:spPr>
         <p:txBody>
-          <a:bodyPr wrap="square" lIns="0" rIns="0" tIns="0" bIns="0">
+          <a:bodyPr wrap="square" lIns="0" tIns="0" rIns="0" bIns="0">
             <a:spAutoFit/>
           </a:bodyPr>
           <a:lstStyle/>
@@ -12475,6 +12547,30 @@
           </a:p>
         </p:txBody>
       </p:sp>
+      <p:pic>
+        <p:nvPicPr>
+          <p:cNvPr id="71" name="Picture 70" descr="aegis_hook_analogy.png"/>
+          <p:cNvPicPr>
+            <a:picLocks noChangeAspect="1"/>
+          </p:cNvPicPr>
+          <p:nvPr/>
+        </p:nvPicPr>
+        <p:blipFill>
+          <a:blip r:embed="rId3"/>
+          <a:stretch>
+            <a:fillRect/>
+          </a:stretch>
+        </p:blipFill>
+        <p:spPr>
+          <a:xfrm>
+            <a:off x="3729990" y="1369717"/>
+            <a:ext cx="3187700" cy="723856"/>
+          </a:xfrm>
+          <a:prstGeom prst="rect">
+            <a:avLst/>
+          </a:prstGeom>
+        </p:spPr>
+      </p:pic>
     </p:spTree>
     <p:extLst>
       <p:ext uri="{BB962C8B-B14F-4D97-AF65-F5344CB8AC3E}">
@@ -15235,7 +15331,7 @@
           <a:noFill/>
         </p:spPr>
         <p:txBody>
-          <a:bodyPr wrap="square" lIns="0" rIns="0" tIns="0" bIns="0">
+          <a:bodyPr wrap="square" lIns="0" tIns="0" rIns="0" bIns="0">
             <a:spAutoFit/>
           </a:bodyPr>
           <a:lstStyle/>
@@ -15294,7 +15390,7 @@
           <a:noFill/>
         </p:spPr>
         <p:txBody>
-          <a:bodyPr wrap="square" lIns="0" rIns="0" tIns="0" bIns="0">
+          <a:bodyPr wrap="square" lIns="0" tIns="0" rIns="0" bIns="0">
             <a:spAutoFit/>
           </a:bodyPr>
           <a:lstStyle/>
@@ -15353,7 +15449,7 @@
           <a:noFill/>
         </p:spPr>
         <p:txBody>
-          <a:bodyPr wrap="square" lIns="0" rIns="0" tIns="0" bIns="0">
+          <a:bodyPr wrap="square" lIns="0" tIns="0" rIns="0" bIns="0">
             <a:spAutoFit/>
           </a:bodyPr>
           <a:lstStyle/>
@@ -15412,7 +15508,7 @@
           <a:noFill/>
         </p:spPr>
         <p:txBody>
-          <a:bodyPr wrap="square" lIns="0" rIns="0" tIns="0" bIns="0">
+          <a:bodyPr wrap="square" lIns="0" tIns="0" rIns="0" bIns="0">
             <a:spAutoFit/>
           </a:bodyPr>
           <a:lstStyle/>
@@ -15471,7 +15567,7 @@
           <a:noFill/>
         </p:spPr>
         <p:txBody>
-          <a:bodyPr wrap="square" lIns="0" rIns="0" tIns="0" bIns="0">
+          <a:bodyPr wrap="square" lIns="0" tIns="0" rIns="0" bIns="0">
             <a:spAutoFit/>
           </a:bodyPr>
           <a:lstStyle/>
@@ -15530,7 +15626,7 @@
           <a:noFill/>
         </p:spPr>
         <p:txBody>
-          <a:bodyPr wrap="square" lIns="0" rIns="0" tIns="0" bIns="0">
+          <a:bodyPr wrap="square" lIns="0" tIns="0" rIns="0" bIns="0">
             <a:spAutoFit/>
           </a:bodyPr>
           <a:lstStyle/>
@@ -15572,6 +15668,30 @@
           </a:p>
         </p:txBody>
       </p:sp>
+      <p:pic>
+        <p:nvPicPr>
+          <p:cNvPr id="71" name="Picture 70" descr="architecture.png"/>
+          <p:cNvPicPr>
+            <a:picLocks noChangeAspect="1"/>
+          </p:cNvPicPr>
+          <p:nvPr/>
+        </p:nvPicPr>
+        <p:blipFill>
+          <a:blip r:embed="rId3"/>
+          <a:stretch>
+            <a:fillRect/>
+          </a:stretch>
+        </p:blipFill>
+        <p:spPr>
+          <a:xfrm>
+            <a:off x="1086012" y="696595"/>
+            <a:ext cx="1490655" cy="2070100"/>
+          </a:xfrm>
+          <a:prstGeom prst="rect">
+            <a:avLst/>
+          </a:prstGeom>
+        </p:spPr>
+      </p:pic>
     </p:spTree>
     <p:extLst>
       <p:ext uri="{BB962C8B-B14F-4D97-AF65-F5344CB8AC3E}">
@@ -18319,7 +18439,7 @@
           <a:noFill/>
         </p:spPr>
         <p:txBody>
-          <a:bodyPr wrap="square" lIns="0" rIns="0" tIns="0" bIns="0">
+          <a:bodyPr wrap="square" lIns="0" tIns="0" rIns="0" bIns="0">
             <a:spAutoFit/>
           </a:bodyPr>
           <a:lstStyle/>
@@ -18378,7 +18498,7 @@
           <a:noFill/>
         </p:spPr>
         <p:txBody>
-          <a:bodyPr wrap="square" lIns="0" rIns="0" tIns="0" bIns="0">
+          <a:bodyPr wrap="square" lIns="0" tIns="0" rIns="0" bIns="0">
             <a:spAutoFit/>
           </a:bodyPr>
           <a:lstStyle/>
@@ -18437,7 +18557,7 @@
           <a:noFill/>
         </p:spPr>
         <p:txBody>
-          <a:bodyPr wrap="square" lIns="0" rIns="0" tIns="0" bIns="0">
+          <a:bodyPr wrap="square" lIns="0" tIns="0" rIns="0" bIns="0">
             <a:spAutoFit/>
           </a:bodyPr>
           <a:lstStyle/>
@@ -18496,7 +18616,7 @@
           <a:noFill/>
         </p:spPr>
         <p:txBody>
-          <a:bodyPr wrap="square" lIns="0" rIns="0" tIns="0" bIns="0">
+          <a:bodyPr wrap="square" lIns="0" tIns="0" rIns="0" bIns="0">
             <a:spAutoFit/>
           </a:bodyPr>
           <a:lstStyle/>
@@ -18555,7 +18675,7 @@
           <a:noFill/>
         </p:spPr>
         <p:txBody>
-          <a:bodyPr wrap="square" lIns="0" rIns="0" tIns="0" bIns="0">
+          <a:bodyPr wrap="square" lIns="0" tIns="0" rIns="0" bIns="0">
             <a:spAutoFit/>
           </a:bodyPr>
           <a:lstStyle/>
@@ -18614,7 +18734,7 @@
           <a:noFill/>
         </p:spPr>
         <p:txBody>
-          <a:bodyPr wrap="square" lIns="0" rIns="0" tIns="0" bIns="0">
+          <a:bodyPr wrap="square" lIns="0" tIns="0" rIns="0" bIns="0">
             <a:spAutoFit/>
           </a:bodyPr>
           <a:lstStyle/>
@@ -18656,6 +18776,54 @@
           </a:p>
         </p:txBody>
       </p:sp>
+      <p:pic>
+        <p:nvPicPr>
+          <p:cNvPr id="71" name="Picture 70" descr="dashboard.jpg"/>
+          <p:cNvPicPr>
+            <a:picLocks noChangeAspect="1"/>
+          </p:cNvPicPr>
+          <p:nvPr/>
+        </p:nvPicPr>
+        <p:blipFill>
+          <a:blip r:embed="rId3"/>
+          <a:stretch>
+            <a:fillRect/>
+          </a:stretch>
+        </p:blipFill>
+        <p:spPr>
+          <a:xfrm>
+            <a:off x="340868" y="696595"/>
+            <a:ext cx="2980944" cy="2070100"/>
+          </a:xfrm>
+          <a:prstGeom prst="rect">
+            <a:avLst/>
+          </a:prstGeom>
+        </p:spPr>
+      </p:pic>
+      <p:pic>
+        <p:nvPicPr>
+          <p:cNvPr id="72" name="Picture 71" descr="aegis_eval.png"/>
+          <p:cNvPicPr>
+            <a:picLocks noChangeAspect="1"/>
+          </p:cNvPicPr>
+          <p:nvPr/>
+        </p:nvPicPr>
+        <p:blipFill>
+          <a:blip r:embed="rId4"/>
+          <a:stretch>
+            <a:fillRect/>
+          </a:stretch>
+        </p:blipFill>
+        <p:spPr>
+          <a:xfrm>
+            <a:off x="7235190" y="4361584"/>
+            <a:ext cx="3187700" cy="1217121"/>
+          </a:xfrm>
+          <a:prstGeom prst="rect">
+            <a:avLst/>
+          </a:prstGeom>
+        </p:spPr>
+      </p:pic>
     </p:spTree>
     <p:extLst>
       <p:ext uri="{BB962C8B-B14F-4D97-AF65-F5344CB8AC3E}">
@@ -21382,7 +21550,7 @@
           <a:noFill/>
         </p:spPr>
         <p:txBody>
-          <a:bodyPr wrap="square" lIns="0" rIns="0" tIns="0" bIns="0">
+          <a:bodyPr wrap="square" lIns="0" tIns="0" rIns="0" bIns="0">
             <a:spAutoFit/>
           </a:bodyPr>
           <a:lstStyle/>
@@ -21441,7 +21609,7 @@
           <a:noFill/>
         </p:spPr>
         <p:txBody>
-          <a:bodyPr wrap="square" lIns="0" rIns="0" tIns="0" bIns="0">
+          <a:bodyPr wrap="square" lIns="0" tIns="0" rIns="0" bIns="0">
             <a:spAutoFit/>
           </a:bodyPr>
           <a:lstStyle/>
@@ -21500,7 +21668,7 @@
           <a:noFill/>
         </p:spPr>
         <p:txBody>
-          <a:bodyPr wrap="square" lIns="0" rIns="0" tIns="0" bIns="0">
+          <a:bodyPr wrap="square" lIns="0" tIns="0" rIns="0" bIns="0">
             <a:spAutoFit/>
           </a:bodyPr>
           <a:lstStyle/>
@@ -21559,7 +21727,7 @@
           <a:noFill/>
         </p:spPr>
         <p:txBody>
-          <a:bodyPr wrap="square" lIns="0" rIns="0" tIns="0" bIns="0">
+          <a:bodyPr wrap="square" lIns="0" tIns="0" rIns="0" bIns="0">
             <a:spAutoFit/>
           </a:bodyPr>
           <a:lstStyle/>
@@ -21618,7 +21786,7 @@
           <a:noFill/>
         </p:spPr>
         <p:txBody>
-          <a:bodyPr wrap="square" lIns="0" rIns="0" tIns="0" bIns="0">
+          <a:bodyPr wrap="square" lIns="0" tIns="0" rIns="0" bIns="0">
             <a:spAutoFit/>
           </a:bodyPr>
           <a:lstStyle/>
@@ -21677,7 +21845,7 @@
           <a:noFill/>
         </p:spPr>
         <p:txBody>
-          <a:bodyPr wrap="square" lIns="0" rIns="0" tIns="0" bIns="0">
+          <a:bodyPr wrap="square" lIns="0" tIns="0" rIns="0" bIns="0">
             <a:spAutoFit/>
           </a:bodyPr>
           <a:lstStyle/>
@@ -21719,6 +21887,30 @@
           </a:p>
         </p:txBody>
       </p:sp>
+      <p:pic>
+        <p:nvPicPr>
+          <p:cNvPr id="71" name="Picture 70" descr="aegis_eval.png"/>
+          <p:cNvPicPr>
+            <a:picLocks noChangeAspect="1"/>
+          </p:cNvPicPr>
+          <p:nvPr/>
+        </p:nvPicPr>
+        <p:blipFill>
+          <a:blip r:embed="rId3"/>
+          <a:stretch>
+            <a:fillRect/>
+          </a:stretch>
+        </p:blipFill>
+        <p:spPr>
+          <a:xfrm>
+            <a:off x="7235190" y="4361584"/>
+            <a:ext cx="3187700" cy="1217121"/>
+          </a:xfrm>
+          <a:prstGeom prst="rect">
+            <a:avLst/>
+          </a:prstGeom>
+        </p:spPr>
+      </p:pic>
     </p:spTree>
     <p:extLst>
       <p:ext uri="{BB962C8B-B14F-4D97-AF65-F5344CB8AC3E}">
@@ -24525,7 +24717,7 @@
           <a:noFill/>
         </p:spPr>
         <p:txBody>
-          <a:bodyPr wrap="square" lIns="0" rIns="0" tIns="0" bIns="0">
+          <a:bodyPr wrap="square" lIns="0" tIns="0" rIns="0" bIns="0">
             <a:spAutoFit/>
           </a:bodyPr>
           <a:lstStyle/>
@@ -24584,7 +24776,7 @@
           <a:noFill/>
         </p:spPr>
         <p:txBody>
-          <a:bodyPr wrap="square" lIns="0" rIns="0" tIns="0" bIns="0">
+          <a:bodyPr wrap="square" lIns="0" tIns="0" rIns="0" bIns="0">
             <a:spAutoFit/>
           </a:bodyPr>
           <a:lstStyle/>
@@ -24643,7 +24835,7 @@
           <a:noFill/>
         </p:spPr>
         <p:txBody>
-          <a:bodyPr wrap="square" lIns="0" rIns="0" tIns="0" bIns="0">
+          <a:bodyPr wrap="square" lIns="0" tIns="0" rIns="0" bIns="0">
             <a:spAutoFit/>
           </a:bodyPr>
           <a:lstStyle/>
@@ -24702,7 +24894,7 @@
           <a:noFill/>
         </p:spPr>
         <p:txBody>
-          <a:bodyPr wrap="square" lIns="0" rIns="0" tIns="0" bIns="0">
+          <a:bodyPr wrap="square" lIns="0" tIns="0" rIns="0" bIns="0">
             <a:spAutoFit/>
           </a:bodyPr>
           <a:lstStyle/>
@@ -24749,7 +24941,7 @@
           <a:noFill/>
         </p:spPr>
         <p:txBody>
-          <a:bodyPr wrap="square" lIns="0" rIns="0" tIns="0" bIns="0">
+          <a:bodyPr wrap="square" lIns="0" tIns="0" rIns="0" bIns="0">
             <a:spAutoFit/>
           </a:bodyPr>
           <a:lstStyle/>
@@ -24808,7 +25000,7 @@
           <a:noFill/>
         </p:spPr>
         <p:txBody>
-          <a:bodyPr wrap="square" lIns="0" rIns="0" tIns="0" bIns="0">
+          <a:bodyPr wrap="square" lIns="0" tIns="0" rIns="0" bIns="0">
             <a:spAutoFit/>
           </a:bodyPr>
           <a:lstStyle/>
@@ -27589,7 +27781,7 @@
           <a:noFill/>
         </p:spPr>
         <p:txBody>
-          <a:bodyPr wrap="square" lIns="0" rIns="0" tIns="0" bIns="0">
+          <a:bodyPr wrap="square" lIns="0" tIns="0" rIns="0" bIns="0">
             <a:spAutoFit/>
           </a:bodyPr>
           <a:lstStyle/>
@@ -27648,7 +27840,7 @@
           <a:noFill/>
         </p:spPr>
         <p:txBody>
-          <a:bodyPr wrap="square" lIns="0" rIns="0" tIns="0" bIns="0">
+          <a:bodyPr wrap="square" lIns="0" tIns="0" rIns="0" bIns="0">
             <a:spAutoFit/>
           </a:bodyPr>
           <a:lstStyle/>
@@ -27707,7 +27899,7 @@
           <a:noFill/>
         </p:spPr>
         <p:txBody>
-          <a:bodyPr wrap="square" lIns="0" rIns="0" tIns="0" bIns="0">
+          <a:bodyPr wrap="square" lIns="0" tIns="0" rIns="0" bIns="0">
             <a:spAutoFit/>
           </a:bodyPr>
           <a:lstStyle/>
@@ -27766,7 +27958,7 @@
           <a:noFill/>
         </p:spPr>
         <p:txBody>
-          <a:bodyPr wrap="square" lIns="0" rIns="0" tIns="0" bIns="0">
+          <a:bodyPr wrap="square" lIns="0" tIns="0" rIns="0" bIns="0">
             <a:spAutoFit/>
           </a:bodyPr>
           <a:lstStyle/>
@@ -27825,7 +28017,7 @@
           <a:noFill/>
         </p:spPr>
         <p:txBody>
-          <a:bodyPr wrap="square" lIns="0" rIns="0" tIns="0" bIns="0">
+          <a:bodyPr wrap="square" lIns="0" tIns="0" rIns="0" bIns="0">
             <a:spAutoFit/>
           </a:bodyPr>
           <a:lstStyle/>
@@ -27884,7 +28076,7 @@
           <a:noFill/>
         </p:spPr>
         <p:txBody>
-          <a:bodyPr wrap="square" lIns="0" rIns="0" tIns="0" bIns="0">
+          <a:bodyPr wrap="square" lIns="0" tIns="0" rIns="0" bIns="0">
             <a:spAutoFit/>
           </a:bodyPr>
           <a:lstStyle/>
@@ -27958,10 +28150,10 @@
       </p:grpSpPr>
       <p:sp>
         <p:nvSpPr>
-          <p:cNvPr id="30" name="Google Shape;749;p69">
+          <p:cNvPr id="28" name="Google Shape;749;p69">
             <a:extLst>
               <a:ext uri="{FF2B5EF4-FFF2-40B4-BE49-F238E27FC236}">
-                <a16:creationId xmlns:a16="http://schemas.microsoft.com/office/drawing/2014/main" id="{20E7ABEA-04E4-4B5E-8EB6-B692BCF28DBF}"/>
+                <a16:creationId xmlns:a16="http://schemas.microsoft.com/office/drawing/2014/main" id="{CBD30F07-6871-4503-B70C-03DD4C50FDD9}"/>
               </a:ext>
             </a:extLst>
           </p:cNvPr>
@@ -27970,7 +28162,7 @@
         </p:nvSpPr>
         <p:spPr>
           <a:xfrm>
-            <a:off x="1196569" y="5053383"/>
+            <a:off x="5344319" y="2194328"/>
             <a:ext cx="2384955" cy="2392056"/>
           </a:xfrm>
           <a:prstGeom prst="ellipse">
@@ -27997,10 +28189,10 @@
       </p:sp>
       <p:sp>
         <p:nvSpPr>
-          <p:cNvPr id="29" name="Google Shape;749;p69">
+          <p:cNvPr id="27" name="Google Shape;749;p69">
             <a:extLst>
               <a:ext uri="{FF2B5EF4-FFF2-40B4-BE49-F238E27FC236}">
-                <a16:creationId xmlns:a16="http://schemas.microsoft.com/office/drawing/2014/main" id="{A06EF363-7321-4789-B70A-BF7EE0475D79}"/>
+                <a16:creationId xmlns:a16="http://schemas.microsoft.com/office/drawing/2014/main" id="{BCB06B9F-0035-4EAD-B976-4A1DE9730F61}"/>
               </a:ext>
             </a:extLst>
           </p:cNvPr>
@@ -28009,7 +28201,7 @@
         </p:nvSpPr>
         <p:spPr>
           <a:xfrm>
-            <a:off x="4197868" y="216894"/>
+            <a:off x="1196569" y="2122577"/>
             <a:ext cx="2384955" cy="2392056"/>
           </a:xfrm>
           <a:prstGeom prst="ellipse">
@@ -28030,124 +28222,7 @@
           </a:bodyPr>
           <a:lstStyle/>
           <a:p>
-            <a:endParaRPr sz="1578"/>
-          </a:p>
-        </p:txBody>
-      </p:sp>
-      <p:sp>
-        <p:nvSpPr>
-          <p:cNvPr id="28" name="Google Shape;749;p69">
-            <a:extLst>
-              <a:ext uri="{FF2B5EF4-FFF2-40B4-BE49-F238E27FC236}">
-                <a16:creationId xmlns:a16="http://schemas.microsoft.com/office/drawing/2014/main" id="{CBD30F07-6871-4503-B70C-03DD4C50FDD9}"/>
-              </a:ext>
-            </a:extLst>
-          </p:cNvPr>
-          <p:cNvSpPr/>
-          <p:nvPr/>
-        </p:nvSpPr>
-        <p:spPr>
-          <a:xfrm>
-            <a:off x="5262846" y="5170794"/>
-            <a:ext cx="2384955" cy="2392056"/>
-          </a:xfrm>
-          <a:prstGeom prst="ellipse">
-            <a:avLst/>
-          </a:prstGeom>
-          <a:solidFill>
-            <a:srgbClr val="B6CFE6">
-              <a:alpha val="35750"/>
-            </a:srgbClr>
-          </a:solidFill>
-          <a:ln>
-            <a:noFill/>
-          </a:ln>
-        </p:spPr>
-        <p:txBody>
-          <a:bodyPr spcFirstLastPara="1" wrap="square" lIns="80152" tIns="80152" rIns="80152" bIns="80152" anchor="ctr" anchorCtr="0">
-            <a:noAutofit/>
-          </a:bodyPr>
-          <a:lstStyle/>
-          <a:p>
-            <a:endParaRPr sz="1578"/>
-          </a:p>
-        </p:txBody>
-      </p:sp>
-      <p:sp>
-        <p:nvSpPr>
-          <p:cNvPr id="27" name="Google Shape;749;p69">
-            <a:extLst>
-              <a:ext uri="{FF2B5EF4-FFF2-40B4-BE49-F238E27FC236}">
-                <a16:creationId xmlns:a16="http://schemas.microsoft.com/office/drawing/2014/main" id="{BCB06B9F-0035-4EAD-B976-4A1DE9730F61}"/>
-              </a:ext>
-            </a:extLst>
-          </p:cNvPr>
-          <p:cNvSpPr/>
-          <p:nvPr/>
-        </p:nvSpPr>
-        <p:spPr>
-          <a:xfrm>
-            <a:off x="1196569" y="2122577"/>
-            <a:ext cx="2384955" cy="2392056"/>
-          </a:xfrm>
-          <a:prstGeom prst="ellipse">
-            <a:avLst/>
-          </a:prstGeom>
-          <a:solidFill>
-            <a:srgbClr val="B6CFE6">
-              <a:alpha val="35750"/>
-            </a:srgbClr>
-          </a:solidFill>
-          <a:ln>
-            <a:noFill/>
-          </a:ln>
-        </p:spPr>
-        <p:txBody>
-          <a:bodyPr spcFirstLastPara="1" wrap="square" lIns="80152" tIns="80152" rIns="80152" bIns="80152" anchor="ctr" anchorCtr="0">
-            <a:noAutofit/>
-          </a:bodyPr>
-          <a:lstStyle/>
-          <a:p>
             <a:endParaRPr sz="1578" dirty="0"/>
-          </a:p>
-        </p:txBody>
-      </p:sp>
-      <p:sp>
-        <p:nvSpPr>
-          <p:cNvPr id="23" name="Google Shape;749;p69">
-            <a:extLst>
-              <a:ext uri="{FF2B5EF4-FFF2-40B4-BE49-F238E27FC236}">
-                <a16:creationId xmlns:a16="http://schemas.microsoft.com/office/drawing/2014/main" id="{29D87DB6-7A6D-4180-8EA7-2E4C6B658563}"/>
-              </a:ext>
-            </a:extLst>
-          </p:cNvPr>
-          <p:cNvSpPr/>
-          <p:nvPr/>
-        </p:nvSpPr>
-        <p:spPr>
-          <a:xfrm>
-            <a:off x="7493931" y="2492500"/>
-            <a:ext cx="2384955" cy="2392056"/>
-          </a:xfrm>
-          <a:prstGeom prst="ellipse">
-            <a:avLst/>
-          </a:prstGeom>
-          <a:solidFill>
-            <a:srgbClr val="B6CFE6">
-              <a:alpha val="35750"/>
-            </a:srgbClr>
-          </a:solidFill>
-          <a:ln>
-            <a:noFill/>
-          </a:ln>
-        </p:spPr>
-        <p:txBody>
-          <a:bodyPr spcFirstLastPara="1" wrap="square" lIns="80152" tIns="80152" rIns="80152" bIns="80152" anchor="ctr" anchorCtr="0">
-            <a:noAutofit/>
-          </a:bodyPr>
-          <a:lstStyle/>
-          <a:p>
-            <a:endParaRPr sz="1578"/>
           </a:p>
         </p:txBody>
       </p:sp>
@@ -28169,7 +28244,7 @@
         </p:nvSpPr>
         <p:spPr>
           <a:xfrm>
-            <a:off x="482938" y="775246"/>
+            <a:off x="398963" y="658858"/>
             <a:ext cx="4861381" cy="968658"/>
           </a:xfrm>
         </p:spPr>
@@ -28389,7 +28464,7 @@
           </a:lstStyle>
           <a:p>
             <a:r>
-              <a:rPr lang="en-US" sz="1929"/>
+              <a:rPr lang="en-US" sz="1929" dirty="0"/>
               <a:t>Meet the team</a:t>
             </a:r>
           </a:p>
@@ -28403,8 +28478,8 @@
         </p:nvSpPr>
         <p:spPr>
           <a:xfrm>
-            <a:off x="600000" y="2800000"/>
-            <a:ext cx="9000000" cy="2000000"/>
+            <a:off x="1196568" y="3112699"/>
+            <a:ext cx="2384955" cy="400110"/>
           </a:xfrm>
           <a:prstGeom prst="rect">
             <a:avLst/>
@@ -28418,7 +28493,7 @@
           <a:lstStyle/>
           <a:p>
             <a:r>
-              <a:rPr sz="2000">
+              <a:rPr sz="2000" dirty="0">
                 <a:solidFill>
                   <a:srgbClr val="020C31"/>
                 </a:solidFill>
@@ -28427,16 +28502,55 @@
               <a:t>Fauzan Ejaz (Captain)</a:t>
             </a:r>
           </a:p>
-          <a:p>
-            <a:r>
-              <a:rPr sz="2000">
+        </p:txBody>
+      </p:sp>
+      <p:sp>
+        <p:nvSpPr>
+          <p:cNvPr id="2" name="TextBox 1">
+            <a:extLst>
+              <a:ext uri="{FF2B5EF4-FFF2-40B4-BE49-F238E27FC236}">
+                <a16:creationId xmlns:a16="http://schemas.microsoft.com/office/drawing/2014/main" id="{CE607F4C-6C97-4729-0B02-CAFD6CD56FDC}"/>
+              </a:ext>
+            </a:extLst>
+          </p:cNvPr>
+          <p:cNvSpPr txBox="1"/>
+          <p:nvPr/>
+        </p:nvSpPr>
+        <p:spPr>
+          <a:xfrm>
+            <a:off x="5682343" y="3099727"/>
+            <a:ext cx="2649894" cy="738664"/>
+          </a:xfrm>
+          <a:prstGeom prst="rect">
+            <a:avLst/>
+          </a:prstGeom>
+          <a:noFill/>
+        </p:spPr>
+        <p:txBody>
+          <a:bodyPr wrap="square" rtlCol="0">
+            <a:spAutoFit/>
+          </a:bodyPr>
+          <a:lstStyle/>
+          <a:p>
+            <a:r>
+              <a:rPr lang="en-IN" sz="2400" dirty="0" err="1">
                 <a:solidFill>
                   <a:srgbClr val="020C31"/>
                 </a:solidFill>
-                <a:latin typeface="Calibri"/>
-              </a:rPr>
-              <a:t>Llagami Tedi</a:t>
-            </a:r>
+              </a:rPr>
+              <a:t>Llagami</a:t>
+            </a:r>
+            <a:r>
+              <a:rPr lang="en-IN" sz="2400" dirty="0">
+                <a:solidFill>
+                  <a:srgbClr val="020C31"/>
+                </a:solidFill>
+              </a:rPr>
+              <a:t> Tedi</a:t>
+            </a:r>
+          </a:p>
+          <a:p>
+            <a:endParaRPr lang="en-IN" dirty="0"/>
           </a:p>
         </p:txBody>
       </p:sp>
@@ -28944,7 +29058,22 @@
 </file>
 
 <file path=customXml/itemProps2.xml><?xml version="1.0" encoding="utf-8"?>
-<ds:datastoreItem xmlns:ds="http://schemas.openxmlformats.org/officeDocument/2006/customXml" ds:itemID="{AFE32100-327A-46D5-A299-81E97F5FBF53}"/>
+<ds:datastoreItem xmlns:ds="http://schemas.openxmlformats.org/officeDocument/2006/customXml" ds:itemID="{AFE32100-327A-46D5-A299-81E97F5FBF53}">
+  <ds:schemaRefs>
+    <ds:schemaRef ds:uri="http://schemas.microsoft.com/office/2006/metadata/contentType"/>
+    <ds:schemaRef ds:uri="http://schemas.microsoft.com/office/2006/metadata/properties/metaAttributes"/>
+    <ds:schemaRef ds:uri="http://www.w3.org/2001/XMLSchema"/>
+    <ds:schemaRef ds:uri="http://schemas.microsoft.com/office/2006/metadata/properties"/>
+    <ds:schemaRef ds:uri="df1bf422-076b-4923-a343-86f92e681c13"/>
+    <ds:schemaRef ds:uri="17320c4f-b4d7-4a2f-a568-c234bef09358"/>
+    <ds:schemaRef ds:uri="http://schemas.microsoft.com/office/2006/documentManagement/types"/>
+    <ds:schemaRef ds:uri="http://schemas.microsoft.com/office/infopath/2007/PartnerControls"/>
+    <ds:schemaRef ds:uri="http://schemas.openxmlformats.org/package/2006/metadata/core-properties"/>
+    <ds:schemaRef ds:uri="http://purl.org/dc/elements/1.1/"/>
+    <ds:schemaRef ds:uri="http://purl.org/dc/terms/"/>
+    <ds:schemaRef ds:uri="http://schemas.microsoft.com/internal/obd"/>
+  </ds:schemaRefs>
+</ds:datastoreItem>
 </file>
 
 <file path=customXml/itemProps3.xml><?xml version="1.0" encoding="utf-8"?>

--- a/slides/GATE-3/AEGIS_Gate3_Storyboard.pptx
+++ b/slides/GATE-3/AEGIS_Gate3_Storyboard.pptx
@@ -5799,62 +5799,6 @@
       </p:sp>
       <p:sp>
         <p:nvSpPr>
-          <p:cNvPr id="63" name="object 6">
-            <a:extLst>
-              <a:ext uri="{FF2B5EF4-FFF2-40B4-BE49-F238E27FC236}">
-                <a16:creationId xmlns:a16="http://schemas.microsoft.com/office/drawing/2014/main" id="{A92A90AF-5BC5-164C-BAE0-15271A672BC8}"/>
-              </a:ext>
-            </a:extLst>
-          </p:cNvPr>
-          <p:cNvSpPr txBox="1"/>
-          <p:nvPr/>
-        </p:nvSpPr>
-        <p:spPr>
-          <a:xfrm>
-            <a:off x="73342" y="100951"/>
-            <a:ext cx="328295" cy="187325"/>
-          </a:xfrm>
-          <a:prstGeom prst="rect">
-            <a:avLst/>
-          </a:prstGeom>
-        </p:spPr>
-        <p:txBody>
-          <a:bodyPr vert="horz" wrap="square" lIns="0" tIns="12700" rIns="0" bIns="0" rtlCol="0">
-            <a:spAutoFit/>
-          </a:bodyPr>
-          <a:lstStyle/>
-          <a:p>
-            <a:pPr marL="0" marR="0">
-              <a:spcBef>
-                <a:spcPts val="100"/>
-              </a:spcBef>
-              <a:spcAft>
-                <a:spcPts val="0"/>
-              </a:spcAft>
-            </a:pPr>
-            <a:r>
-              <a:rPr lang="en-US" sz="1100" kern="1200" spc="-40" dirty="0">
-                <a:solidFill>
-                  <a:srgbClr val="9B9B9B"/>
-                </a:solidFill>
-                <a:effectLst/>
-                <a:latin typeface="Arial" panose="020B0604020202020204" pitchFamily="34" charset="0"/>
-                <a:ea typeface="Times New Roman" panose="02020603050405020304" pitchFamily="18" charset="0"/>
-                <a:cs typeface="Arial" panose="020B0604020202020204" pitchFamily="34" charset="0"/>
-              </a:rPr>
-              <a:t>Title: AEGIS - Zero-Trust Identity for AI Agents</a:t>
-            </a:r>
-            <a:endParaRPr lang="en-US" sz="1100" dirty="0">
-              <a:effectLst/>
-              <a:latin typeface="Arial" panose="020B0604020202020204" pitchFamily="34" charset="0"/>
-              <a:ea typeface="Times New Roman" panose="02020603050405020304" pitchFamily="18" charset="0"/>
-              <a:cs typeface="Arial" panose="020B0604020202020204" pitchFamily="34" charset="0"/>
-            </a:endParaRPr>
-          </a:p>
-        </p:txBody>
-      </p:sp>
-      <p:sp>
-        <p:nvSpPr>
           <p:cNvPr id="64" name="object 5">
             <a:extLst>
               <a:ext uri="{FF2B5EF4-FFF2-40B4-BE49-F238E27FC236}">
@@ -6347,8 +6291,8 @@
           </a:stretch>
         </p:blipFill>
         <p:spPr>
-          <a:xfrm>
-            <a:off x="8083712" y="696595"/>
+          <a:xfrm rot="16200000">
+            <a:off x="8083712" y="818673"/>
             <a:ext cx="1490655" cy="2070100"/>
           </a:xfrm>
           <a:prstGeom prst="rect">
@@ -6372,8 +6316,8 @@
         </p:blipFill>
         <p:spPr>
           <a:xfrm>
-            <a:off x="237490" y="4608217"/>
-            <a:ext cx="3187700" cy="723856"/>
+            <a:off x="319563" y="4619083"/>
+            <a:ext cx="3023553" cy="723856"/>
           </a:xfrm>
           <a:prstGeom prst="rect">
             <a:avLst/>
@@ -8979,62 +8923,6 @@
       </p:sp>
       <p:sp>
         <p:nvSpPr>
-          <p:cNvPr id="63" name="object 6">
-            <a:extLst>
-              <a:ext uri="{FF2B5EF4-FFF2-40B4-BE49-F238E27FC236}">
-                <a16:creationId xmlns:a16="http://schemas.microsoft.com/office/drawing/2014/main" id="{A92A90AF-5BC5-164C-BAE0-15271A672BC8}"/>
-              </a:ext>
-            </a:extLst>
-          </p:cNvPr>
-          <p:cNvSpPr txBox="1"/>
-          <p:nvPr/>
-        </p:nvSpPr>
-        <p:spPr>
-          <a:xfrm>
-            <a:off x="365811" y="239475"/>
-            <a:ext cx="328295" cy="187325"/>
-          </a:xfrm>
-          <a:prstGeom prst="rect">
-            <a:avLst/>
-          </a:prstGeom>
-        </p:spPr>
-        <p:txBody>
-          <a:bodyPr vert="horz" wrap="square" lIns="0" tIns="12700" rIns="0" bIns="0" rtlCol="0">
-            <a:spAutoFit/>
-          </a:bodyPr>
-          <a:lstStyle/>
-          <a:p>
-            <a:pPr marL="0" marR="0">
-              <a:spcBef>
-                <a:spcPts val="100"/>
-              </a:spcBef>
-              <a:spcAft>
-                <a:spcPts val="0"/>
-              </a:spcAft>
-            </a:pPr>
-            <a:r>
-              <a:rPr lang="en-US" sz="1100" kern="1200" spc="-40">
-                <a:solidFill>
-                  <a:srgbClr val="9B9B9B"/>
-                </a:solidFill>
-                <a:effectLst/>
-                <a:latin typeface="Arial" panose="020B0604020202020204" pitchFamily="34" charset="0"/>
-                <a:ea typeface="Times New Roman" panose="02020603050405020304" pitchFamily="18" charset="0"/>
-                <a:cs typeface="Arial" panose="020B0604020202020204" pitchFamily="34" charset="0"/>
-              </a:rPr>
-              <a:t>Title: AEGIS - Zero-Trust Identity for AI Agents</a:t>
-            </a:r>
-            <a:endParaRPr lang="en-US" sz="1100">
-              <a:effectLst/>
-              <a:latin typeface="Arial" panose="020B0604020202020204" pitchFamily="34" charset="0"/>
-              <a:ea typeface="Times New Roman" panose="02020603050405020304" pitchFamily="18" charset="0"/>
-              <a:cs typeface="Arial" panose="020B0604020202020204" pitchFamily="34" charset="0"/>
-            </a:endParaRPr>
-          </a:p>
-        </p:txBody>
-      </p:sp>
-      <p:sp>
-        <p:nvSpPr>
           <p:cNvPr id="64" name="object 5">
             <a:extLst>
               <a:ext uri="{FF2B5EF4-FFF2-40B4-BE49-F238E27FC236}">
@@ -9446,8 +9334,8 @@
           </a:stretch>
         </p:blipFill>
         <p:spPr>
-          <a:xfrm>
-            <a:off x="4578512" y="696595"/>
+          <a:xfrm rot="16200000">
+            <a:off x="4572162" y="805819"/>
             <a:ext cx="1490655" cy="2070100"/>
           </a:xfrm>
           <a:prstGeom prst="rect">
@@ -12083,62 +11971,6 @@
       </p:sp>
       <p:sp>
         <p:nvSpPr>
-          <p:cNvPr id="63" name="object 6">
-            <a:extLst>
-              <a:ext uri="{FF2B5EF4-FFF2-40B4-BE49-F238E27FC236}">
-                <a16:creationId xmlns:a16="http://schemas.microsoft.com/office/drawing/2014/main" id="{A92A90AF-5BC5-164C-BAE0-15271A672BC8}"/>
-              </a:ext>
-            </a:extLst>
-          </p:cNvPr>
-          <p:cNvSpPr txBox="1"/>
-          <p:nvPr/>
-        </p:nvSpPr>
-        <p:spPr>
-          <a:xfrm>
-            <a:off x="365811" y="239475"/>
-            <a:ext cx="328295" cy="187325"/>
-          </a:xfrm>
-          <a:prstGeom prst="rect">
-            <a:avLst/>
-          </a:prstGeom>
-        </p:spPr>
-        <p:txBody>
-          <a:bodyPr vert="horz" wrap="square" lIns="0" tIns="12700" rIns="0" bIns="0" rtlCol="0">
-            <a:spAutoFit/>
-          </a:bodyPr>
-          <a:lstStyle/>
-          <a:p>
-            <a:pPr marL="0" marR="0">
-              <a:spcBef>
-                <a:spcPts val="100"/>
-              </a:spcBef>
-              <a:spcAft>
-                <a:spcPts val="0"/>
-              </a:spcAft>
-            </a:pPr>
-            <a:r>
-              <a:rPr lang="en-US" sz="1100" kern="1200" spc="-40">
-                <a:solidFill>
-                  <a:srgbClr val="9B9B9B"/>
-                </a:solidFill>
-                <a:effectLst/>
-                <a:latin typeface="Arial" panose="020B0604020202020204" pitchFamily="34" charset="0"/>
-                <a:ea typeface="Times New Roman" panose="02020603050405020304" pitchFamily="18" charset="0"/>
-                <a:cs typeface="Arial" panose="020B0604020202020204" pitchFamily="34" charset="0"/>
-              </a:rPr>
-              <a:t>Title: AEGIS - Zero-Trust Identity for AI Agents</a:t>
-            </a:r>
-            <a:endParaRPr lang="en-US" sz="1100">
-              <a:effectLst/>
-              <a:latin typeface="Arial" panose="020B0604020202020204" pitchFamily="34" charset="0"/>
-              <a:ea typeface="Times New Roman" panose="02020603050405020304" pitchFamily="18" charset="0"/>
-              <a:cs typeface="Arial" panose="020B0604020202020204" pitchFamily="34" charset="0"/>
-            </a:endParaRPr>
-          </a:p>
-        </p:txBody>
-      </p:sp>
-      <p:sp>
-        <p:nvSpPr>
           <p:cNvPr id="64" name="object 5">
             <a:extLst>
               <a:ext uri="{FF2B5EF4-FFF2-40B4-BE49-F238E27FC236}">
@@ -15204,62 +15036,6 @@
       </p:sp>
       <p:sp>
         <p:nvSpPr>
-          <p:cNvPr id="63" name="object 6">
-            <a:extLst>
-              <a:ext uri="{FF2B5EF4-FFF2-40B4-BE49-F238E27FC236}">
-                <a16:creationId xmlns:a16="http://schemas.microsoft.com/office/drawing/2014/main" id="{A92A90AF-5BC5-164C-BAE0-15271A672BC8}"/>
-              </a:ext>
-            </a:extLst>
-          </p:cNvPr>
-          <p:cNvSpPr txBox="1"/>
-          <p:nvPr/>
-        </p:nvSpPr>
-        <p:spPr>
-          <a:xfrm>
-            <a:off x="365811" y="239475"/>
-            <a:ext cx="328295" cy="187325"/>
-          </a:xfrm>
-          <a:prstGeom prst="rect">
-            <a:avLst/>
-          </a:prstGeom>
-        </p:spPr>
-        <p:txBody>
-          <a:bodyPr vert="horz" wrap="square" lIns="0" tIns="12700" rIns="0" bIns="0" rtlCol="0">
-            <a:spAutoFit/>
-          </a:bodyPr>
-          <a:lstStyle/>
-          <a:p>
-            <a:pPr marL="0" marR="0">
-              <a:spcBef>
-                <a:spcPts val="100"/>
-              </a:spcBef>
-              <a:spcAft>
-                <a:spcPts val="0"/>
-              </a:spcAft>
-            </a:pPr>
-            <a:r>
-              <a:rPr lang="en-US" sz="1100" kern="1200" spc="-40">
-                <a:solidFill>
-                  <a:srgbClr val="9B9B9B"/>
-                </a:solidFill>
-                <a:effectLst/>
-                <a:latin typeface="Arial" panose="020B0604020202020204" pitchFamily="34" charset="0"/>
-                <a:ea typeface="Times New Roman" panose="02020603050405020304" pitchFamily="18" charset="0"/>
-                <a:cs typeface="Arial" panose="020B0604020202020204" pitchFamily="34" charset="0"/>
-              </a:rPr>
-              <a:t>Title: AEGIS - Zero-Trust Identity for AI Agents</a:t>
-            </a:r>
-            <a:endParaRPr lang="en-US" sz="1100">
-              <a:effectLst/>
-              <a:latin typeface="Arial" panose="020B0604020202020204" pitchFamily="34" charset="0"/>
-              <a:ea typeface="Times New Roman" panose="02020603050405020304" pitchFamily="18" charset="0"/>
-              <a:cs typeface="Arial" panose="020B0604020202020204" pitchFamily="34" charset="0"/>
-            </a:endParaRPr>
-          </a:p>
-        </p:txBody>
-      </p:sp>
-      <p:sp>
-        <p:nvSpPr>
           <p:cNvPr id="64" name="object 5">
             <a:extLst>
               <a:ext uri="{FF2B5EF4-FFF2-40B4-BE49-F238E27FC236}">
@@ -15683,9 +15459,9 @@
           </a:stretch>
         </p:blipFill>
         <p:spPr>
-          <a:xfrm>
-            <a:off x="1086012" y="696595"/>
-            <a:ext cx="1490655" cy="2070100"/>
+          <a:xfrm rot="16200000">
+            <a:off x="929149" y="886241"/>
+            <a:ext cx="1405605" cy="1951989"/>
           </a:xfrm>
           <a:prstGeom prst="rect">
             <a:avLst/>
@@ -18312,62 +18088,6 @@
       </p:sp>
       <p:sp>
         <p:nvSpPr>
-          <p:cNvPr id="63" name="object 6">
-            <a:extLst>
-              <a:ext uri="{FF2B5EF4-FFF2-40B4-BE49-F238E27FC236}">
-                <a16:creationId xmlns:a16="http://schemas.microsoft.com/office/drawing/2014/main" id="{A92A90AF-5BC5-164C-BAE0-15271A672BC8}"/>
-              </a:ext>
-            </a:extLst>
-          </p:cNvPr>
-          <p:cNvSpPr txBox="1"/>
-          <p:nvPr/>
-        </p:nvSpPr>
-        <p:spPr>
-          <a:xfrm>
-            <a:off x="365811" y="239475"/>
-            <a:ext cx="328295" cy="187325"/>
-          </a:xfrm>
-          <a:prstGeom prst="rect">
-            <a:avLst/>
-          </a:prstGeom>
-        </p:spPr>
-        <p:txBody>
-          <a:bodyPr vert="horz" wrap="square" lIns="0" tIns="12700" rIns="0" bIns="0" rtlCol="0">
-            <a:spAutoFit/>
-          </a:bodyPr>
-          <a:lstStyle/>
-          <a:p>
-            <a:pPr marL="0" marR="0">
-              <a:spcBef>
-                <a:spcPts val="100"/>
-              </a:spcBef>
-              <a:spcAft>
-                <a:spcPts val="0"/>
-              </a:spcAft>
-            </a:pPr>
-            <a:r>
-              <a:rPr lang="en-US" sz="1100" kern="1200" spc="-40">
-                <a:solidFill>
-                  <a:srgbClr val="9B9B9B"/>
-                </a:solidFill>
-                <a:effectLst/>
-                <a:latin typeface="Arial" panose="020B0604020202020204" pitchFamily="34" charset="0"/>
-                <a:ea typeface="Times New Roman" panose="02020603050405020304" pitchFamily="18" charset="0"/>
-                <a:cs typeface="Arial" panose="020B0604020202020204" pitchFamily="34" charset="0"/>
-              </a:rPr>
-              <a:t>Title: AEGIS - Zero-Trust Identity for AI Agents</a:t>
-            </a:r>
-            <a:endParaRPr lang="en-US" sz="1100">
-              <a:effectLst/>
-              <a:latin typeface="Arial" panose="020B0604020202020204" pitchFamily="34" charset="0"/>
-              <a:ea typeface="Times New Roman" panose="02020603050405020304" pitchFamily="18" charset="0"/>
-              <a:cs typeface="Arial" panose="020B0604020202020204" pitchFamily="34" charset="0"/>
-            </a:endParaRPr>
-          </a:p>
-        </p:txBody>
-      </p:sp>
-      <p:sp>
-        <p:nvSpPr>
           <p:cNvPr id="64" name="object 5">
             <a:extLst>
               <a:ext uri="{FF2B5EF4-FFF2-40B4-BE49-F238E27FC236}">
@@ -18792,8 +18512,8 @@
         </p:blipFill>
         <p:spPr>
           <a:xfrm>
-            <a:off x="340868" y="696595"/>
-            <a:ext cx="2980944" cy="2070100"/>
+            <a:off x="630614" y="1083640"/>
+            <a:ext cx="2388751" cy="1658855"/>
           </a:xfrm>
           <a:prstGeom prst="rect">
             <a:avLst/>
@@ -18818,6 +18538,78 @@
           <a:xfrm>
             <a:off x="7235190" y="4361584"/>
             <a:ext cx="3187700" cy="1217121"/>
+          </a:xfrm>
+          <a:prstGeom prst="rect">
+            <a:avLst/>
+          </a:prstGeom>
+        </p:spPr>
+      </p:pic>
+      <p:pic>
+        <p:nvPicPr>
+          <p:cNvPr id="73" name="Picture 72" descr="dash_live_attack.png"/>
+          <p:cNvPicPr>
+            <a:picLocks noChangeAspect="1"/>
+          </p:cNvPicPr>
+          <p:nvPr/>
+        </p:nvPicPr>
+        <p:blipFill>
+          <a:blip r:embed="rId5"/>
+          <a:stretch>
+            <a:fillRect/>
+          </a:stretch>
+        </p:blipFill>
+        <p:spPr>
+          <a:xfrm>
+            <a:off x="3729990" y="835104"/>
+            <a:ext cx="3187700" cy="1793081"/>
+          </a:xfrm>
+          <a:prstGeom prst="rect">
+            <a:avLst/>
+          </a:prstGeom>
+        </p:spPr>
+      </p:pic>
+      <p:pic>
+        <p:nvPicPr>
+          <p:cNvPr id="74" name="Picture 73" descr="dash_topology.png"/>
+          <p:cNvPicPr>
+            <a:picLocks noChangeAspect="1"/>
+          </p:cNvPicPr>
+          <p:nvPr/>
+        </p:nvPicPr>
+        <p:blipFill>
+          <a:blip r:embed="rId6"/>
+          <a:stretch>
+            <a:fillRect/>
+          </a:stretch>
+        </p:blipFill>
+        <p:spPr>
+          <a:xfrm>
+            <a:off x="7235190" y="835104"/>
+            <a:ext cx="3187700" cy="1793081"/>
+          </a:xfrm>
+          <a:prstGeom prst="rect">
+            <a:avLst/>
+          </a:prstGeom>
+        </p:spPr>
+      </p:pic>
+      <p:pic>
+        <p:nvPicPr>
+          <p:cNvPr id="75" name="Picture 74" descr="dash_incident_inspector.png"/>
+          <p:cNvPicPr>
+            <a:picLocks noChangeAspect="1"/>
+          </p:cNvPicPr>
+          <p:nvPr/>
+        </p:nvPicPr>
+        <p:blipFill>
+          <a:blip r:embed="rId7"/>
+          <a:stretch>
+            <a:fillRect/>
+          </a:stretch>
+        </p:blipFill>
+        <p:spPr>
+          <a:xfrm>
+            <a:off x="237490" y="4073604"/>
+            <a:ext cx="3187700" cy="1793081"/>
           </a:xfrm>
           <a:prstGeom prst="rect">
             <a:avLst/>
@@ -21905,6 +21697,30 @@
           <a:xfrm>
             <a:off x="7235190" y="4361584"/>
             <a:ext cx="3187700" cy="1217121"/>
+          </a:xfrm>
+          <a:prstGeom prst="rect">
+            <a:avLst/>
+          </a:prstGeom>
+        </p:spPr>
+      </p:pic>
+      <p:pic>
+        <p:nvPicPr>
+          <p:cNvPr id="72" name="Picture 71" descr="open5gs_terminal.png"/>
+          <p:cNvPicPr>
+            <a:picLocks noChangeAspect="1"/>
+          </p:cNvPicPr>
+          <p:nvPr/>
+        </p:nvPicPr>
+        <p:blipFill>
+          <a:blip r:embed="rId4"/>
+          <a:stretch>
+            <a:fillRect/>
+          </a:stretch>
+        </p:blipFill>
+        <p:spPr>
+          <a:xfrm>
+            <a:off x="237490" y="934720"/>
+            <a:ext cx="3187700" cy="1593850"/>
           </a:xfrm>
           <a:prstGeom prst="rect">
             <a:avLst/>
@@ -28835,15 +28651,6 @@
 </file>
 
 <file path=customXml/item1.xml><?xml version="1.0" encoding="utf-8"?>
-<?mso-contentType ?>
-<FormTemplates xmlns="http://schemas.microsoft.com/sharepoint/v3/contenttype/forms">
-  <Display>DocumentLibraryForm</Display>
-  <Edit>DocumentLibraryForm</Edit>
-  <New>DocumentLibraryForm</New>
-</FormTemplates>
-</file>
-
-<file path=customXml/item2.xml><?xml version="1.0" encoding="utf-8"?>
 <ct:contentTypeSchema xmlns:ct="http://schemas.microsoft.com/office/2006/metadata/contentType" xmlns:ma="http://schemas.microsoft.com/office/2006/metadata/properties/metaAttributes" ct:_="" ma:_="" ma:contentTypeName="Document" ma:contentTypeID="0x010100942D7E2E766E274BA85FFEF303FE3B84" ma:contentTypeVersion="11" ma:contentTypeDescription="Create a new document." ma:contentTypeScope="" ma:versionID="161f57f8e4da8c53066cecce20e1cf28">
   <xsd:schema xmlns:xsd="http://www.w3.org/2001/XMLSchema" xmlns:xs="http://www.w3.org/2001/XMLSchema" xmlns:p="http://schemas.microsoft.com/office/2006/metadata/properties" xmlns:ns2="df1bf422-076b-4923-a343-86f92e681c13" xmlns:ns3="17320c4f-b4d7-4a2f-a568-c234bef09358" targetNamespace="http://schemas.microsoft.com/office/2006/metadata/properties" ma:root="true" ma:fieldsID="3f75c0bee81b84287f3a5e0ecbeaea68" ns2:_="" ns3:_="">
     <xsd:import namespace="df1bf422-076b-4923-a343-86f92e681c13"/>
@@ -29038,6 +28845,15 @@
 </ct:contentTypeSchema>
 </file>
 
+<file path=customXml/item2.xml><?xml version="1.0" encoding="utf-8"?>
+<?mso-contentType ?>
+<FormTemplates xmlns="http://schemas.microsoft.com/sharepoint/v3/contenttype/forms">
+  <Display>DocumentLibraryForm</Display>
+  <Edit>DocumentLibraryForm</Edit>
+  <New>DocumentLibraryForm</New>
+</FormTemplates>
+</file>
+
 <file path=customXml/item3.xml><?xml version="1.0" encoding="utf-8"?>
 <p:properties xmlns:p="http://schemas.microsoft.com/office/2006/metadata/properties" xmlns:xsi="http://www.w3.org/2001/XMLSchema-instance" xmlns:pc="http://schemas.microsoft.com/office/infopath/2007/PartnerControls">
   <documentManagement>
@@ -29050,14 +28866,6 @@
 </file>
 
 <file path=customXml/itemProps1.xml><?xml version="1.0" encoding="utf-8"?>
-<ds:datastoreItem xmlns:ds="http://schemas.openxmlformats.org/officeDocument/2006/customXml" ds:itemID="{2AA5AF62-29D7-49C4-96C6-35C102D42BEC}">
-  <ds:schemaRefs>
-    <ds:schemaRef ds:uri="http://schemas.microsoft.com/sharepoint/v3/contenttype/forms"/>
-  </ds:schemaRefs>
-</ds:datastoreItem>
-</file>
-
-<file path=customXml/itemProps2.xml><?xml version="1.0" encoding="utf-8"?>
 <ds:datastoreItem xmlns:ds="http://schemas.openxmlformats.org/officeDocument/2006/customXml" ds:itemID="{AFE32100-327A-46D5-A299-81E97F5FBF53}">
   <ds:schemaRefs>
     <ds:schemaRef ds:uri="http://schemas.microsoft.com/office/2006/metadata/contentType"/>
@@ -29072,6 +28880,14 @@
     <ds:schemaRef ds:uri="http://purl.org/dc/elements/1.1/"/>
     <ds:schemaRef ds:uri="http://purl.org/dc/terms/"/>
     <ds:schemaRef ds:uri="http://schemas.microsoft.com/internal/obd"/>
+  </ds:schemaRefs>
+</ds:datastoreItem>
+</file>
+
+<file path=customXml/itemProps2.xml><?xml version="1.0" encoding="utf-8"?>
+<ds:datastoreItem xmlns:ds="http://schemas.openxmlformats.org/officeDocument/2006/customXml" ds:itemID="{2AA5AF62-29D7-49C4-96C6-35C102D42BEC}">
+  <ds:schemaRefs>
+    <ds:schemaRef ds:uri="http://schemas.microsoft.com/sharepoint/v3/contenttype/forms"/>
   </ds:schemaRefs>
 </ds:datastoreItem>
 </file>
